--- a/tests/fixtures/templates/配布資料_公文書高密度_全レイアウト見本.pptx
+++ b/tests/fixtures/templates/配布資料_公文書高密度_全レイアウト見本.pptx
@@ -412,6 +412,30 @@
                 </a:solidFill>
               </a:defRPr>
             </a:lvl1pPr>
+            <a:lvl2pPr algn="ctr" marL="0" indent="0">
+              <a:buNone/>
+              <a:defRPr sz="1250" b="1">
+                <a:solidFill>
+                  <a:srgbClr val="000000"/>
+                </a:solidFill>
+              </a:defRPr>
+            </a:lvl2pPr>
+            <a:lvl3pPr algn="ctr" marL="0" indent="0">
+              <a:buNone/>
+              <a:defRPr sz="1050" b="1">
+                <a:solidFill>
+                  <a:srgbClr val="000000"/>
+                </a:solidFill>
+              </a:defRPr>
+            </a:lvl3pPr>
+            <a:lvl4pPr algn="ctr" marL="0" indent="0">
+              <a:buNone/>
+              <a:defRPr sz="900" b="1">
+                <a:solidFill>
+                  <a:srgbClr val="000000"/>
+                </a:solidFill>
+              </a:defRPr>
+            </a:lvl4pPr>
           </a:lstStyle>
           <a:p>
             <a:r>
@@ -450,6 +474,36 @@
                 <a:ea typeface="MS PGothic"/>
               </a:defRPr>
             </a:lvl1pPr>
+            <a:lvl2pPr algn="ctr" marL="0" indent="0">
+              <a:buNone/>
+              <a:defRPr sz="1050" b="0">
+                <a:solidFill>
+                  <a:srgbClr val="000000"/>
+                </a:solidFill>
+                <a:latin typeface="MS PGothic"/>
+                <a:ea typeface="MS PGothic"/>
+              </a:defRPr>
+            </a:lvl2pPr>
+            <a:lvl3pPr algn="ctr" marL="0" indent="0">
+              <a:buNone/>
+              <a:defRPr sz="900" b="0">
+                <a:solidFill>
+                  <a:srgbClr val="000000"/>
+                </a:solidFill>
+                <a:latin typeface="MS PGothic"/>
+                <a:ea typeface="MS PGothic"/>
+              </a:defRPr>
+            </a:lvl3pPr>
+            <a:lvl4pPr algn="ctr" marL="0" indent="0">
+              <a:buNone/>
+              <a:defRPr sz="750" b="0">
+                <a:solidFill>
+                  <a:srgbClr val="000000"/>
+                </a:solidFill>
+                <a:latin typeface="MS PGothic"/>
+                <a:ea typeface="MS PGothic"/>
+              </a:defRPr>
+            </a:lvl4pPr>
           </a:lstStyle>
           <a:p>
             <a:r>
@@ -530,6 +584,30 @@
                 </a:solidFill>
               </a:defRPr>
             </a:lvl1pPr>
+            <a:lvl2pPr algn="l" marL="0" indent="0">
+              <a:buNone/>
+              <a:defRPr sz="1150" b="0">
+                <a:solidFill>
+                  <a:srgbClr val="000000"/>
+                </a:solidFill>
+              </a:defRPr>
+            </a:lvl2pPr>
+            <a:lvl3pPr algn="l" marL="0" indent="0">
+              <a:buNone/>
+              <a:defRPr sz="1000" b="0">
+                <a:solidFill>
+                  <a:srgbClr val="000000"/>
+                </a:solidFill>
+              </a:defRPr>
+            </a:lvl3pPr>
+            <a:lvl4pPr algn="l" marL="0" indent="0">
+              <a:buNone/>
+              <a:defRPr sz="800" b="0">
+                <a:solidFill>
+                  <a:srgbClr val="000000"/>
+                </a:solidFill>
+              </a:defRPr>
+            </a:lvl4pPr>
           </a:lstStyle>
           <a:p>
             <a:r>
@@ -774,6 +852,36 @@
                 <a:ea typeface="MS PGothic"/>
               </a:defRPr>
             </a:lvl1pPr>
+            <a:lvl2pPr algn="l" marL="0" indent="0">
+              <a:buNone/>
+              <a:defRPr sz="950" b="0">
+                <a:solidFill>
+                  <a:srgbClr val="000000"/>
+                </a:solidFill>
+                <a:latin typeface="Consolas"/>
+                <a:ea typeface="MS PGothic"/>
+              </a:defRPr>
+            </a:lvl2pPr>
+            <a:lvl3pPr algn="l" marL="0" indent="0">
+              <a:buNone/>
+              <a:defRPr sz="850" b="0">
+                <a:solidFill>
+                  <a:srgbClr val="000000"/>
+                </a:solidFill>
+                <a:latin typeface="Consolas"/>
+                <a:ea typeface="MS PGothic"/>
+              </a:defRPr>
+            </a:lvl3pPr>
+            <a:lvl4pPr algn="l" marL="0" indent="0">
+              <a:buNone/>
+              <a:defRPr sz="700" b="0">
+                <a:solidFill>
+                  <a:srgbClr val="000000"/>
+                </a:solidFill>
+                <a:latin typeface="Consolas"/>
+                <a:ea typeface="MS PGothic"/>
+              </a:defRPr>
+            </a:lvl4pPr>
           </a:lstStyle>
           <a:p>
             <a:r>
@@ -812,6 +920,36 @@
                 <a:ea typeface="MS PGothic"/>
               </a:defRPr>
             </a:lvl1pPr>
+            <a:lvl2pPr algn="l" marL="0" indent="0">
+              <a:buNone/>
+              <a:defRPr sz="900" b="0">
+                <a:solidFill>
+                  <a:srgbClr val="595959"/>
+                </a:solidFill>
+                <a:latin typeface="MS PGothic"/>
+                <a:ea typeface="MS PGothic"/>
+              </a:defRPr>
+            </a:lvl2pPr>
+            <a:lvl3pPr algn="l" marL="0" indent="0">
+              <a:buNone/>
+              <a:defRPr sz="750" b="0">
+                <a:solidFill>
+                  <a:srgbClr val="595959"/>
+                </a:solidFill>
+                <a:latin typeface="MS PGothic"/>
+                <a:ea typeface="MS PGothic"/>
+              </a:defRPr>
+            </a:lvl3pPr>
+            <a:lvl4pPr algn="l" marL="0" indent="0">
+              <a:buNone/>
+              <a:defRPr sz="650" b="0">
+                <a:solidFill>
+                  <a:srgbClr val="595959"/>
+                </a:solidFill>
+                <a:latin typeface="MS PGothic"/>
+                <a:ea typeface="MS PGothic"/>
+              </a:defRPr>
+            </a:lvl4pPr>
           </a:lstStyle>
           <a:p>
             <a:r>
@@ -872,6 +1010,39 @@
                 <a:cs typeface="MS PGothic"/>
               </a:defRPr>
             </a:lvl1pPr>
+            <a:lvl2pPr algn="r" marL="0" indent="0">
+              <a:buNone/>
+              <a:defRPr sz="800" b="0">
+                <a:solidFill>
+                  <a:srgbClr val="FFFFFF"/>
+                </a:solidFill>
+                <a:latin typeface="MS PGothic"/>
+                <a:ea typeface="MS PGothic"/>
+                <a:cs typeface="MS PGothic"/>
+              </a:defRPr>
+            </a:lvl2pPr>
+            <a:lvl3pPr algn="r" marL="0" indent="0">
+              <a:buNone/>
+              <a:defRPr sz="700" b="0">
+                <a:solidFill>
+                  <a:srgbClr val="FFFFFF"/>
+                </a:solidFill>
+                <a:latin typeface="MS PGothic"/>
+                <a:ea typeface="MS PGothic"/>
+                <a:cs typeface="MS PGothic"/>
+              </a:defRPr>
+            </a:lvl3pPr>
+            <a:lvl4pPr algn="r" marL="0" indent="0">
+              <a:buNone/>
+              <a:defRPr sz="550" b="0">
+                <a:solidFill>
+                  <a:srgbClr val="FFFFFF"/>
+                </a:solidFill>
+                <a:latin typeface="MS PGothic"/>
+                <a:ea typeface="MS PGothic"/>
+                <a:cs typeface="MS PGothic"/>
+              </a:defRPr>
+            </a:lvl4pPr>
           </a:lstStyle>
           <a:p>
             <a:r>
@@ -911,6 +1082,39 @@
                 <a:cs typeface="MS PGothic"/>
               </a:defRPr>
             </a:lvl1pPr>
+            <a:lvl2pPr algn="l" marL="0" indent="0">
+              <a:buNone/>
+              <a:defRPr sz="750" b="0">
+                <a:solidFill>
+                  <a:srgbClr val="595959"/>
+                </a:solidFill>
+                <a:latin typeface="MS PGothic"/>
+                <a:ea typeface="MS PGothic"/>
+                <a:cs typeface="MS PGothic"/>
+              </a:defRPr>
+            </a:lvl2pPr>
+            <a:lvl3pPr algn="l" marL="0" indent="0">
+              <a:buNone/>
+              <a:defRPr sz="650" b="0">
+                <a:solidFill>
+                  <a:srgbClr val="595959"/>
+                </a:solidFill>
+                <a:latin typeface="MS PGothic"/>
+                <a:ea typeface="MS PGothic"/>
+                <a:cs typeface="MS PGothic"/>
+              </a:defRPr>
+            </a:lvl3pPr>
+            <a:lvl4pPr algn="l" marL="0" indent="0">
+              <a:buNone/>
+              <a:defRPr sz="550" b="0">
+                <a:solidFill>
+                  <a:srgbClr val="595959"/>
+                </a:solidFill>
+                <a:latin typeface="MS PGothic"/>
+                <a:ea typeface="MS PGothic"/>
+                <a:cs typeface="MS PGothic"/>
+              </a:defRPr>
+            </a:lvl4pPr>
           </a:lstStyle>
           <a:p>
             <a:r>
@@ -1063,6 +1267,27 @@
                 </a:solidFill>
               </a:defRPr>
             </a:lvl1pPr>
+            <a:lvl2pPr algn="l">
+              <a:defRPr sz="1250" b="0">
+                <a:solidFill>
+                  <a:srgbClr val="1A1A1A"/>
+                </a:solidFill>
+              </a:defRPr>
+            </a:lvl2pPr>
+            <a:lvl3pPr algn="l">
+              <a:defRPr sz="1050" b="0">
+                <a:solidFill>
+                  <a:srgbClr val="1A1A1A"/>
+                </a:solidFill>
+              </a:defRPr>
+            </a:lvl3pPr>
+            <a:lvl4pPr algn="l">
+              <a:defRPr sz="900" b="0">
+                <a:solidFill>
+                  <a:srgbClr val="1A1A1A"/>
+                </a:solidFill>
+              </a:defRPr>
+            </a:lvl4pPr>
           </a:lstStyle>
           <a:p>
             <a:pPr lvl="0"/>
@@ -1218,6 +1443,39 @@
                 <a:cs typeface="MS PGothic"/>
               </a:defRPr>
             </a:lvl1pPr>
+            <a:lvl2pPr algn="r" marL="0" indent="0">
+              <a:buNone/>
+              <a:defRPr sz="800" b="0">
+                <a:solidFill>
+                  <a:srgbClr val="FFFFFF"/>
+                </a:solidFill>
+                <a:latin typeface="MS PGothic"/>
+                <a:ea typeface="MS PGothic"/>
+                <a:cs typeface="MS PGothic"/>
+              </a:defRPr>
+            </a:lvl2pPr>
+            <a:lvl3pPr algn="r" marL="0" indent="0">
+              <a:buNone/>
+              <a:defRPr sz="700" b="0">
+                <a:solidFill>
+                  <a:srgbClr val="FFFFFF"/>
+                </a:solidFill>
+                <a:latin typeface="MS PGothic"/>
+                <a:ea typeface="MS PGothic"/>
+                <a:cs typeface="MS PGothic"/>
+              </a:defRPr>
+            </a:lvl3pPr>
+            <a:lvl4pPr algn="r" marL="0" indent="0">
+              <a:buNone/>
+              <a:defRPr sz="550" b="0">
+                <a:solidFill>
+                  <a:srgbClr val="FFFFFF"/>
+                </a:solidFill>
+                <a:latin typeface="MS PGothic"/>
+                <a:ea typeface="MS PGothic"/>
+                <a:cs typeface="MS PGothic"/>
+              </a:defRPr>
+            </a:lvl4pPr>
           </a:lstStyle>
           <a:p>
             <a:r>
@@ -1257,6 +1515,39 @@
                 <a:cs typeface="MS PGothic"/>
               </a:defRPr>
             </a:lvl1pPr>
+            <a:lvl2pPr algn="l" marL="0" indent="0">
+              <a:buNone/>
+              <a:defRPr sz="750" b="0">
+                <a:solidFill>
+                  <a:srgbClr val="595959"/>
+                </a:solidFill>
+                <a:latin typeface="MS PGothic"/>
+                <a:ea typeface="MS PGothic"/>
+                <a:cs typeface="MS PGothic"/>
+              </a:defRPr>
+            </a:lvl2pPr>
+            <a:lvl3pPr algn="l" marL="0" indent="0">
+              <a:buNone/>
+              <a:defRPr sz="650" b="0">
+                <a:solidFill>
+                  <a:srgbClr val="595959"/>
+                </a:solidFill>
+                <a:latin typeface="MS PGothic"/>
+                <a:ea typeface="MS PGothic"/>
+                <a:cs typeface="MS PGothic"/>
+              </a:defRPr>
+            </a:lvl3pPr>
+            <a:lvl4pPr algn="l" marL="0" indent="0">
+              <a:buNone/>
+              <a:defRPr sz="550" b="0">
+                <a:solidFill>
+                  <a:srgbClr val="595959"/>
+                </a:solidFill>
+                <a:latin typeface="MS PGothic"/>
+                <a:ea typeface="MS PGothic"/>
+                <a:cs typeface="MS PGothic"/>
+              </a:defRPr>
+            </a:lvl4pPr>
           </a:lstStyle>
           <a:p>
             <a:r>
@@ -1592,6 +1883,39 @@
                 <a:cs typeface="MS PGothic"/>
               </a:defRPr>
             </a:lvl1pPr>
+            <a:lvl2pPr algn="l" marL="0" indent="0">
+              <a:buNone/>
+              <a:defRPr sz="1150" b="1">
+                <a:solidFill>
+                  <a:srgbClr val="FFFFFF"/>
+                </a:solidFill>
+                <a:latin typeface="MS PGothic"/>
+                <a:ea typeface="MS PGothic"/>
+                <a:cs typeface="MS PGothic"/>
+              </a:defRPr>
+            </a:lvl2pPr>
+            <a:lvl3pPr algn="l" marL="0" indent="0">
+              <a:buNone/>
+              <a:defRPr sz="1000" b="1">
+                <a:solidFill>
+                  <a:srgbClr val="FFFFFF"/>
+                </a:solidFill>
+                <a:latin typeface="MS PGothic"/>
+                <a:ea typeface="MS PGothic"/>
+                <a:cs typeface="MS PGothic"/>
+              </a:defRPr>
+            </a:lvl3pPr>
+            <a:lvl4pPr algn="l" marL="0" indent="0">
+              <a:buNone/>
+              <a:defRPr sz="800" b="1">
+                <a:solidFill>
+                  <a:srgbClr val="FFFFFF"/>
+                </a:solidFill>
+                <a:latin typeface="MS PGothic"/>
+                <a:ea typeface="MS PGothic"/>
+                <a:cs typeface="MS PGothic"/>
+              </a:defRPr>
+            </a:lvl4pPr>
           </a:lstStyle>
           <a:p>
             <a:r>
@@ -1670,6 +1994,39 @@
                 <a:cs typeface="MS PGothic"/>
               </a:defRPr>
             </a:lvl1pPr>
+            <a:lvl2pPr algn="l" marL="0" indent="0">
+              <a:buNone/>
+              <a:defRPr sz="950" b="0">
+                <a:solidFill>
+                  <a:srgbClr val="000000"/>
+                </a:solidFill>
+                <a:latin typeface="MS PGothic"/>
+                <a:ea typeface="MS PGothic"/>
+                <a:cs typeface="MS PGothic"/>
+              </a:defRPr>
+            </a:lvl2pPr>
+            <a:lvl3pPr algn="l" marL="0" indent="0">
+              <a:buNone/>
+              <a:defRPr sz="850" b="0">
+                <a:solidFill>
+                  <a:srgbClr val="000000"/>
+                </a:solidFill>
+                <a:latin typeface="MS PGothic"/>
+                <a:ea typeface="MS PGothic"/>
+                <a:cs typeface="MS PGothic"/>
+              </a:defRPr>
+            </a:lvl3pPr>
+            <a:lvl4pPr algn="l" marL="0" indent="0">
+              <a:buNone/>
+              <a:defRPr sz="700" b="0">
+                <a:solidFill>
+                  <a:srgbClr val="000000"/>
+                </a:solidFill>
+                <a:latin typeface="MS PGothic"/>
+                <a:ea typeface="MS PGothic"/>
+                <a:cs typeface="MS PGothic"/>
+              </a:defRPr>
+            </a:lvl4pPr>
           </a:lstStyle>
           <a:p>
             <a:r>
@@ -1709,6 +2066,39 @@
                 <a:cs typeface="MS PGothic"/>
               </a:defRPr>
             </a:lvl1pPr>
+            <a:lvl2pPr algn="l" marL="0" indent="0">
+              <a:buNone/>
+              <a:defRPr sz="1150" b="1">
+                <a:solidFill>
+                  <a:srgbClr val="FFFFFF"/>
+                </a:solidFill>
+                <a:latin typeface="MS PGothic"/>
+                <a:ea typeface="MS PGothic"/>
+                <a:cs typeface="MS PGothic"/>
+              </a:defRPr>
+            </a:lvl2pPr>
+            <a:lvl3pPr algn="l" marL="0" indent="0">
+              <a:buNone/>
+              <a:defRPr sz="1000" b="1">
+                <a:solidFill>
+                  <a:srgbClr val="FFFFFF"/>
+                </a:solidFill>
+                <a:latin typeface="MS PGothic"/>
+                <a:ea typeface="MS PGothic"/>
+                <a:cs typeface="MS PGothic"/>
+              </a:defRPr>
+            </a:lvl3pPr>
+            <a:lvl4pPr algn="l" marL="0" indent="0">
+              <a:buNone/>
+              <a:defRPr sz="800" b="1">
+                <a:solidFill>
+                  <a:srgbClr val="FFFFFF"/>
+                </a:solidFill>
+                <a:latin typeface="MS PGothic"/>
+                <a:ea typeface="MS PGothic"/>
+                <a:cs typeface="MS PGothic"/>
+              </a:defRPr>
+            </a:lvl4pPr>
           </a:lstStyle>
           <a:p>
             <a:r>
@@ -1787,6 +2177,39 @@
                 <a:cs typeface="MS PGothic"/>
               </a:defRPr>
             </a:lvl1pPr>
+            <a:lvl2pPr algn="l" marL="0" indent="0">
+              <a:buNone/>
+              <a:defRPr sz="950" b="0">
+                <a:solidFill>
+                  <a:srgbClr val="000000"/>
+                </a:solidFill>
+                <a:latin typeface="MS PGothic"/>
+                <a:ea typeface="MS PGothic"/>
+                <a:cs typeface="MS PGothic"/>
+              </a:defRPr>
+            </a:lvl2pPr>
+            <a:lvl3pPr algn="l" marL="0" indent="0">
+              <a:buNone/>
+              <a:defRPr sz="850" b="0">
+                <a:solidFill>
+                  <a:srgbClr val="000000"/>
+                </a:solidFill>
+                <a:latin typeface="MS PGothic"/>
+                <a:ea typeface="MS PGothic"/>
+                <a:cs typeface="MS PGothic"/>
+              </a:defRPr>
+            </a:lvl3pPr>
+            <a:lvl4pPr algn="l" marL="0" indent="0">
+              <a:buNone/>
+              <a:defRPr sz="700" b="0">
+                <a:solidFill>
+                  <a:srgbClr val="000000"/>
+                </a:solidFill>
+                <a:latin typeface="MS PGothic"/>
+                <a:ea typeface="MS PGothic"/>
+                <a:cs typeface="MS PGothic"/>
+              </a:defRPr>
+            </a:lvl4pPr>
           </a:lstStyle>
           <a:p>
             <a:r>
@@ -1826,6 +2249,39 @@
                 <a:cs typeface="MS PGothic"/>
               </a:defRPr>
             </a:lvl1pPr>
+            <a:lvl2pPr algn="l" marL="0" indent="0">
+              <a:buNone/>
+              <a:defRPr sz="1150" b="1">
+                <a:solidFill>
+                  <a:srgbClr val="FFFFFF"/>
+                </a:solidFill>
+                <a:latin typeface="MS PGothic"/>
+                <a:ea typeface="MS PGothic"/>
+                <a:cs typeface="MS PGothic"/>
+              </a:defRPr>
+            </a:lvl2pPr>
+            <a:lvl3pPr algn="l" marL="0" indent="0">
+              <a:buNone/>
+              <a:defRPr sz="1000" b="1">
+                <a:solidFill>
+                  <a:srgbClr val="FFFFFF"/>
+                </a:solidFill>
+                <a:latin typeface="MS PGothic"/>
+                <a:ea typeface="MS PGothic"/>
+                <a:cs typeface="MS PGothic"/>
+              </a:defRPr>
+            </a:lvl3pPr>
+            <a:lvl4pPr algn="l" marL="0" indent="0">
+              <a:buNone/>
+              <a:defRPr sz="800" b="1">
+                <a:solidFill>
+                  <a:srgbClr val="FFFFFF"/>
+                </a:solidFill>
+                <a:latin typeface="MS PGothic"/>
+                <a:ea typeface="MS PGothic"/>
+                <a:cs typeface="MS PGothic"/>
+              </a:defRPr>
+            </a:lvl4pPr>
           </a:lstStyle>
           <a:p>
             <a:r>
@@ -1904,6 +2360,39 @@
                 <a:cs typeface="MS PGothic"/>
               </a:defRPr>
             </a:lvl1pPr>
+            <a:lvl2pPr algn="l" marL="0" indent="0">
+              <a:buNone/>
+              <a:defRPr sz="950" b="0">
+                <a:solidFill>
+                  <a:srgbClr val="000000"/>
+                </a:solidFill>
+                <a:latin typeface="MS PGothic"/>
+                <a:ea typeface="MS PGothic"/>
+                <a:cs typeface="MS PGothic"/>
+              </a:defRPr>
+            </a:lvl2pPr>
+            <a:lvl3pPr algn="l" marL="0" indent="0">
+              <a:buNone/>
+              <a:defRPr sz="850" b="0">
+                <a:solidFill>
+                  <a:srgbClr val="000000"/>
+                </a:solidFill>
+                <a:latin typeface="MS PGothic"/>
+                <a:ea typeface="MS PGothic"/>
+                <a:cs typeface="MS PGothic"/>
+              </a:defRPr>
+            </a:lvl3pPr>
+            <a:lvl4pPr algn="l" marL="0" indent="0">
+              <a:buNone/>
+              <a:defRPr sz="700" b="0">
+                <a:solidFill>
+                  <a:srgbClr val="000000"/>
+                </a:solidFill>
+                <a:latin typeface="MS PGothic"/>
+                <a:ea typeface="MS PGothic"/>
+                <a:cs typeface="MS PGothic"/>
+              </a:defRPr>
+            </a:lvl4pPr>
           </a:lstStyle>
           <a:p>
             <a:r>
@@ -2030,6 +2519,39 @@
                 <a:cs typeface="MS PGothic"/>
               </a:defRPr>
             </a:lvl1pPr>
+            <a:lvl2pPr algn="r" marL="0" indent="0">
+              <a:buNone/>
+              <a:defRPr sz="800" b="0">
+                <a:solidFill>
+                  <a:srgbClr val="FFFFFF"/>
+                </a:solidFill>
+                <a:latin typeface="MS PGothic"/>
+                <a:ea typeface="MS PGothic"/>
+                <a:cs typeface="MS PGothic"/>
+              </a:defRPr>
+            </a:lvl2pPr>
+            <a:lvl3pPr algn="r" marL="0" indent="0">
+              <a:buNone/>
+              <a:defRPr sz="700" b="0">
+                <a:solidFill>
+                  <a:srgbClr val="FFFFFF"/>
+                </a:solidFill>
+                <a:latin typeface="MS PGothic"/>
+                <a:ea typeface="MS PGothic"/>
+                <a:cs typeface="MS PGothic"/>
+              </a:defRPr>
+            </a:lvl3pPr>
+            <a:lvl4pPr algn="r" marL="0" indent="0">
+              <a:buNone/>
+              <a:defRPr sz="550" b="0">
+                <a:solidFill>
+                  <a:srgbClr val="FFFFFF"/>
+                </a:solidFill>
+                <a:latin typeface="MS PGothic"/>
+                <a:ea typeface="MS PGothic"/>
+                <a:cs typeface="MS PGothic"/>
+              </a:defRPr>
+            </a:lvl4pPr>
           </a:lstStyle>
           <a:p>
             <a:r>
@@ -2069,6 +2591,39 @@
                 <a:cs typeface="MS PGothic"/>
               </a:defRPr>
             </a:lvl1pPr>
+            <a:lvl2pPr algn="l" marL="0" indent="0">
+              <a:buNone/>
+              <a:defRPr sz="750" b="0">
+                <a:solidFill>
+                  <a:srgbClr val="595959"/>
+                </a:solidFill>
+                <a:latin typeface="MS PGothic"/>
+                <a:ea typeface="MS PGothic"/>
+                <a:cs typeface="MS PGothic"/>
+              </a:defRPr>
+            </a:lvl2pPr>
+            <a:lvl3pPr algn="l" marL="0" indent="0">
+              <a:buNone/>
+              <a:defRPr sz="650" b="0">
+                <a:solidFill>
+                  <a:srgbClr val="595959"/>
+                </a:solidFill>
+                <a:latin typeface="MS PGothic"/>
+                <a:ea typeface="MS PGothic"/>
+                <a:cs typeface="MS PGothic"/>
+              </a:defRPr>
+            </a:lvl3pPr>
+            <a:lvl4pPr algn="l" marL="0" indent="0">
+              <a:buNone/>
+              <a:defRPr sz="550" b="0">
+                <a:solidFill>
+                  <a:srgbClr val="595959"/>
+                </a:solidFill>
+                <a:latin typeface="MS PGothic"/>
+                <a:ea typeface="MS PGothic"/>
+                <a:cs typeface="MS PGothic"/>
+              </a:defRPr>
+            </a:lvl4pPr>
           </a:lstStyle>
           <a:p>
             <a:r>
@@ -2404,6 +2959,39 @@
                 <a:cs typeface="MS PGothic"/>
               </a:defRPr>
             </a:lvl1pPr>
+            <a:lvl2pPr algn="l" marL="0" indent="0">
+              <a:buNone/>
+              <a:defRPr sz="1000" b="0">
+                <a:solidFill>
+                  <a:srgbClr val="000000"/>
+                </a:solidFill>
+                <a:latin typeface="MS PGothic"/>
+                <a:ea typeface="MS PGothic"/>
+                <a:cs typeface="MS PGothic"/>
+              </a:defRPr>
+            </a:lvl2pPr>
+            <a:lvl3pPr algn="l" marL="0" indent="0">
+              <a:buNone/>
+              <a:defRPr sz="850" b="0">
+                <a:solidFill>
+                  <a:srgbClr val="000000"/>
+                </a:solidFill>
+                <a:latin typeface="MS PGothic"/>
+                <a:ea typeface="MS PGothic"/>
+                <a:cs typeface="MS PGothic"/>
+              </a:defRPr>
+            </a:lvl3pPr>
+            <a:lvl4pPr algn="l" marL="0" indent="0">
+              <a:buNone/>
+              <a:defRPr sz="700" b="0">
+                <a:solidFill>
+                  <a:srgbClr val="000000"/>
+                </a:solidFill>
+                <a:latin typeface="MS PGothic"/>
+                <a:ea typeface="MS PGothic"/>
+                <a:cs typeface="MS PGothic"/>
+              </a:defRPr>
+            </a:lvl4pPr>
           </a:lstStyle>
           <a:p>
             <a:r>
@@ -2443,6 +3031,39 @@
                 <a:cs typeface="MS PGothic"/>
               </a:defRPr>
             </a:lvl1pPr>
+            <a:lvl2pPr algn="l" marL="0" indent="0">
+              <a:buNone/>
+              <a:defRPr sz="1000" b="0">
+                <a:solidFill>
+                  <a:srgbClr val="000000"/>
+                </a:solidFill>
+                <a:latin typeface="MS PGothic"/>
+                <a:ea typeface="MS PGothic"/>
+                <a:cs typeface="MS PGothic"/>
+              </a:defRPr>
+            </a:lvl2pPr>
+            <a:lvl3pPr algn="l" marL="0" indent="0">
+              <a:buNone/>
+              <a:defRPr sz="850" b="0">
+                <a:solidFill>
+                  <a:srgbClr val="000000"/>
+                </a:solidFill>
+                <a:latin typeface="MS PGothic"/>
+                <a:ea typeface="MS PGothic"/>
+                <a:cs typeface="MS PGothic"/>
+              </a:defRPr>
+            </a:lvl3pPr>
+            <a:lvl4pPr algn="l" marL="0" indent="0">
+              <a:buNone/>
+              <a:defRPr sz="700" b="0">
+                <a:solidFill>
+                  <a:srgbClr val="000000"/>
+                </a:solidFill>
+                <a:latin typeface="MS PGothic"/>
+                <a:ea typeface="MS PGothic"/>
+                <a:cs typeface="MS PGothic"/>
+              </a:defRPr>
+            </a:lvl4pPr>
           </a:lstStyle>
           <a:p>
             <a:r>
@@ -2482,6 +3103,39 @@
                 <a:cs typeface="MS PGothic"/>
               </a:defRPr>
             </a:lvl1pPr>
+            <a:lvl2pPr algn="l" marL="0" indent="0">
+              <a:buNone/>
+              <a:defRPr sz="1000" b="0">
+                <a:solidFill>
+                  <a:srgbClr val="000000"/>
+                </a:solidFill>
+                <a:latin typeface="MS PGothic"/>
+                <a:ea typeface="MS PGothic"/>
+                <a:cs typeface="MS PGothic"/>
+              </a:defRPr>
+            </a:lvl2pPr>
+            <a:lvl3pPr algn="l" marL="0" indent="0">
+              <a:buNone/>
+              <a:defRPr sz="850" b="0">
+                <a:solidFill>
+                  <a:srgbClr val="000000"/>
+                </a:solidFill>
+                <a:latin typeface="MS PGothic"/>
+                <a:ea typeface="MS PGothic"/>
+                <a:cs typeface="MS PGothic"/>
+              </a:defRPr>
+            </a:lvl3pPr>
+            <a:lvl4pPr algn="l" marL="0" indent="0">
+              <a:buNone/>
+              <a:defRPr sz="700" b="0">
+                <a:solidFill>
+                  <a:srgbClr val="000000"/>
+                </a:solidFill>
+                <a:latin typeface="MS PGothic"/>
+                <a:ea typeface="MS PGothic"/>
+                <a:cs typeface="MS PGothic"/>
+              </a:defRPr>
+            </a:lvl4pPr>
           </a:lstStyle>
           <a:p>
             <a:r>
@@ -2564,6 +3218,39 @@
                 <a:cs typeface="MS PGothic"/>
               </a:defRPr>
             </a:lvl1pPr>
+            <a:lvl2pPr algn="ctr" marL="0" indent="0">
+              <a:buNone/>
+              <a:defRPr sz="1250" b="1">
+                <a:solidFill>
+                  <a:srgbClr val="FFFFFF"/>
+                </a:solidFill>
+                <a:latin typeface="MS PGothic"/>
+                <a:ea typeface="MS PGothic"/>
+                <a:cs typeface="MS PGothic"/>
+              </a:defRPr>
+            </a:lvl2pPr>
+            <a:lvl3pPr algn="ctr" marL="0" indent="0">
+              <a:buNone/>
+              <a:defRPr sz="1050" b="1">
+                <a:solidFill>
+                  <a:srgbClr val="FFFFFF"/>
+                </a:solidFill>
+                <a:latin typeface="MS PGothic"/>
+                <a:ea typeface="MS PGothic"/>
+                <a:cs typeface="MS PGothic"/>
+              </a:defRPr>
+            </a:lvl3pPr>
+            <a:lvl4pPr algn="ctr" marL="0" indent="0">
+              <a:buNone/>
+              <a:defRPr sz="900" b="1">
+                <a:solidFill>
+                  <a:srgbClr val="FFFFFF"/>
+                </a:solidFill>
+                <a:latin typeface="MS PGothic"/>
+                <a:ea typeface="MS PGothic"/>
+                <a:cs typeface="MS PGothic"/>
+              </a:defRPr>
+            </a:lvl4pPr>
           </a:lstStyle>
           <a:p>
             <a:r>
@@ -2603,6 +3290,39 @@
                 <a:cs typeface="MS PGothic"/>
               </a:defRPr>
             </a:lvl1pPr>
+            <a:lvl2pPr algn="l" marL="0" indent="0">
+              <a:buNone/>
+              <a:defRPr sz="1250" b="1">
+                <a:solidFill>
+                  <a:srgbClr val="000000"/>
+                </a:solidFill>
+                <a:latin typeface="MS PGothic"/>
+                <a:ea typeface="MS PGothic"/>
+                <a:cs typeface="MS PGothic"/>
+              </a:defRPr>
+            </a:lvl2pPr>
+            <a:lvl3pPr algn="l" marL="0" indent="0">
+              <a:buNone/>
+              <a:defRPr sz="1050" b="1">
+                <a:solidFill>
+                  <a:srgbClr val="000000"/>
+                </a:solidFill>
+                <a:latin typeface="MS PGothic"/>
+                <a:ea typeface="MS PGothic"/>
+                <a:cs typeface="MS PGothic"/>
+              </a:defRPr>
+            </a:lvl3pPr>
+            <a:lvl4pPr algn="l" marL="0" indent="0">
+              <a:buNone/>
+              <a:defRPr sz="900" b="1">
+                <a:solidFill>
+                  <a:srgbClr val="000000"/>
+                </a:solidFill>
+                <a:latin typeface="MS PGothic"/>
+                <a:ea typeface="MS PGothic"/>
+                <a:cs typeface="MS PGothic"/>
+              </a:defRPr>
+            </a:lvl4pPr>
           </a:lstStyle>
           <a:p>
             <a:r>
@@ -2686,6 +3406,39 @@
                 <a:cs typeface="MS PGothic"/>
               </a:defRPr>
             </a:lvl1pPr>
+            <a:lvl2pPr algn="ctr" marL="0" indent="0">
+              <a:buNone/>
+              <a:defRPr sz="1250" b="1">
+                <a:solidFill>
+                  <a:srgbClr val="FFFFFF"/>
+                </a:solidFill>
+                <a:latin typeface="MS PGothic"/>
+                <a:ea typeface="MS PGothic"/>
+                <a:cs typeface="MS PGothic"/>
+              </a:defRPr>
+            </a:lvl2pPr>
+            <a:lvl3pPr algn="ctr" marL="0" indent="0">
+              <a:buNone/>
+              <a:defRPr sz="1050" b="1">
+                <a:solidFill>
+                  <a:srgbClr val="FFFFFF"/>
+                </a:solidFill>
+                <a:latin typeface="MS PGothic"/>
+                <a:ea typeface="MS PGothic"/>
+                <a:cs typeface="MS PGothic"/>
+              </a:defRPr>
+            </a:lvl3pPr>
+            <a:lvl4pPr algn="ctr" marL="0" indent="0">
+              <a:buNone/>
+              <a:defRPr sz="900" b="1">
+                <a:solidFill>
+                  <a:srgbClr val="FFFFFF"/>
+                </a:solidFill>
+                <a:latin typeface="MS PGothic"/>
+                <a:ea typeface="MS PGothic"/>
+                <a:cs typeface="MS PGothic"/>
+              </a:defRPr>
+            </a:lvl4pPr>
           </a:lstStyle>
           <a:p>
             <a:r>
@@ -2725,6 +3478,39 @@
                 <a:cs typeface="MS PGothic"/>
               </a:defRPr>
             </a:lvl1pPr>
+            <a:lvl2pPr algn="l" marL="0" indent="0">
+              <a:buNone/>
+              <a:defRPr sz="1250" b="1">
+                <a:solidFill>
+                  <a:srgbClr val="000000"/>
+                </a:solidFill>
+                <a:latin typeface="MS PGothic"/>
+                <a:ea typeface="MS PGothic"/>
+                <a:cs typeface="MS PGothic"/>
+              </a:defRPr>
+            </a:lvl2pPr>
+            <a:lvl3pPr algn="l" marL="0" indent="0">
+              <a:buNone/>
+              <a:defRPr sz="1050" b="1">
+                <a:solidFill>
+                  <a:srgbClr val="000000"/>
+                </a:solidFill>
+                <a:latin typeface="MS PGothic"/>
+                <a:ea typeface="MS PGothic"/>
+                <a:cs typeface="MS PGothic"/>
+              </a:defRPr>
+            </a:lvl3pPr>
+            <a:lvl4pPr algn="l" marL="0" indent="0">
+              <a:buNone/>
+              <a:defRPr sz="900" b="1">
+                <a:solidFill>
+                  <a:srgbClr val="000000"/>
+                </a:solidFill>
+                <a:latin typeface="MS PGothic"/>
+                <a:ea typeface="MS PGothic"/>
+                <a:cs typeface="MS PGothic"/>
+              </a:defRPr>
+            </a:lvl4pPr>
           </a:lstStyle>
           <a:p>
             <a:r>
@@ -2808,6 +3594,39 @@
                 <a:cs typeface="MS PGothic"/>
               </a:defRPr>
             </a:lvl1pPr>
+            <a:lvl2pPr algn="ctr" marL="0" indent="0">
+              <a:buNone/>
+              <a:defRPr sz="1250" b="1">
+                <a:solidFill>
+                  <a:srgbClr val="FFFFFF"/>
+                </a:solidFill>
+                <a:latin typeface="MS PGothic"/>
+                <a:ea typeface="MS PGothic"/>
+                <a:cs typeface="MS PGothic"/>
+              </a:defRPr>
+            </a:lvl2pPr>
+            <a:lvl3pPr algn="ctr" marL="0" indent="0">
+              <a:buNone/>
+              <a:defRPr sz="1050" b="1">
+                <a:solidFill>
+                  <a:srgbClr val="FFFFFF"/>
+                </a:solidFill>
+                <a:latin typeface="MS PGothic"/>
+                <a:ea typeface="MS PGothic"/>
+                <a:cs typeface="MS PGothic"/>
+              </a:defRPr>
+            </a:lvl3pPr>
+            <a:lvl4pPr algn="ctr" marL="0" indent="0">
+              <a:buNone/>
+              <a:defRPr sz="900" b="1">
+                <a:solidFill>
+                  <a:srgbClr val="FFFFFF"/>
+                </a:solidFill>
+                <a:latin typeface="MS PGothic"/>
+                <a:ea typeface="MS PGothic"/>
+                <a:cs typeface="MS PGothic"/>
+              </a:defRPr>
+            </a:lvl4pPr>
           </a:lstStyle>
           <a:p>
             <a:r>
@@ -2847,6 +3666,39 @@
                 <a:cs typeface="MS PGothic"/>
               </a:defRPr>
             </a:lvl1pPr>
+            <a:lvl2pPr algn="l" marL="0" indent="0">
+              <a:buNone/>
+              <a:defRPr sz="1250" b="1">
+                <a:solidFill>
+                  <a:srgbClr val="000000"/>
+                </a:solidFill>
+                <a:latin typeface="MS PGothic"/>
+                <a:ea typeface="MS PGothic"/>
+                <a:cs typeface="MS PGothic"/>
+              </a:defRPr>
+            </a:lvl2pPr>
+            <a:lvl3pPr algn="l" marL="0" indent="0">
+              <a:buNone/>
+              <a:defRPr sz="1050" b="1">
+                <a:solidFill>
+                  <a:srgbClr val="000000"/>
+                </a:solidFill>
+                <a:latin typeface="MS PGothic"/>
+                <a:ea typeface="MS PGothic"/>
+                <a:cs typeface="MS PGothic"/>
+              </a:defRPr>
+            </a:lvl3pPr>
+            <a:lvl4pPr algn="l" marL="0" indent="0">
+              <a:buNone/>
+              <a:defRPr sz="900" b="1">
+                <a:solidFill>
+                  <a:srgbClr val="000000"/>
+                </a:solidFill>
+                <a:latin typeface="MS PGothic"/>
+                <a:ea typeface="MS PGothic"/>
+                <a:cs typeface="MS PGothic"/>
+              </a:defRPr>
+            </a:lvl4pPr>
           </a:lstStyle>
           <a:p>
             <a:r>
@@ -2908,6 +3760,39 @@
                 <a:cs typeface="MS PGothic"/>
               </a:defRPr>
             </a:lvl1pPr>
+            <a:lvl2pPr algn="r" marL="0" indent="0">
+              <a:buNone/>
+              <a:defRPr sz="800" b="0">
+                <a:solidFill>
+                  <a:srgbClr val="FFFFFF"/>
+                </a:solidFill>
+                <a:latin typeface="MS PGothic"/>
+                <a:ea typeface="MS PGothic"/>
+                <a:cs typeface="MS PGothic"/>
+              </a:defRPr>
+            </a:lvl2pPr>
+            <a:lvl3pPr algn="r" marL="0" indent="0">
+              <a:buNone/>
+              <a:defRPr sz="700" b="0">
+                <a:solidFill>
+                  <a:srgbClr val="FFFFFF"/>
+                </a:solidFill>
+                <a:latin typeface="MS PGothic"/>
+                <a:ea typeface="MS PGothic"/>
+                <a:cs typeface="MS PGothic"/>
+              </a:defRPr>
+            </a:lvl3pPr>
+            <a:lvl4pPr algn="r" marL="0" indent="0">
+              <a:buNone/>
+              <a:defRPr sz="550" b="0">
+                <a:solidFill>
+                  <a:srgbClr val="FFFFFF"/>
+                </a:solidFill>
+                <a:latin typeface="MS PGothic"/>
+                <a:ea typeface="MS PGothic"/>
+                <a:cs typeface="MS PGothic"/>
+              </a:defRPr>
+            </a:lvl4pPr>
           </a:lstStyle>
           <a:p>
             <a:r>
@@ -2947,6 +3832,39 @@
                 <a:cs typeface="MS PGothic"/>
               </a:defRPr>
             </a:lvl1pPr>
+            <a:lvl2pPr algn="l" marL="0" indent="0">
+              <a:buNone/>
+              <a:defRPr sz="750" b="0">
+                <a:solidFill>
+                  <a:srgbClr val="595959"/>
+                </a:solidFill>
+                <a:latin typeface="MS PGothic"/>
+                <a:ea typeface="MS PGothic"/>
+                <a:cs typeface="MS PGothic"/>
+              </a:defRPr>
+            </a:lvl2pPr>
+            <a:lvl3pPr algn="l" marL="0" indent="0">
+              <a:buNone/>
+              <a:defRPr sz="650" b="0">
+                <a:solidFill>
+                  <a:srgbClr val="595959"/>
+                </a:solidFill>
+                <a:latin typeface="MS PGothic"/>
+                <a:ea typeface="MS PGothic"/>
+                <a:cs typeface="MS PGothic"/>
+              </a:defRPr>
+            </a:lvl3pPr>
+            <a:lvl4pPr algn="l" marL="0" indent="0">
+              <a:buNone/>
+              <a:defRPr sz="550" b="0">
+                <a:solidFill>
+                  <a:srgbClr val="595959"/>
+                </a:solidFill>
+                <a:latin typeface="MS PGothic"/>
+                <a:ea typeface="MS PGothic"/>
+                <a:cs typeface="MS PGothic"/>
+              </a:defRPr>
+            </a:lvl4pPr>
           </a:lstStyle>
           <a:p>
             <a:r>
@@ -3372,6 +4290,39 @@
                 <a:cs typeface="MS PGothic"/>
               </a:defRPr>
             </a:lvl1pPr>
+            <a:lvl2pPr algn="ctr" marL="0" indent="0">
+              <a:buNone/>
+              <a:defRPr sz="1300" b="1">
+                <a:solidFill>
+                  <a:srgbClr val="000000"/>
+                </a:solidFill>
+                <a:latin typeface="MS PGothic"/>
+                <a:ea typeface="MS PGothic"/>
+                <a:cs typeface="MS PGothic"/>
+              </a:defRPr>
+            </a:lvl2pPr>
+            <a:lvl3pPr algn="ctr" marL="0" indent="0">
+              <a:buNone/>
+              <a:defRPr sz="1150" b="1">
+                <a:solidFill>
+                  <a:srgbClr val="000000"/>
+                </a:solidFill>
+                <a:latin typeface="MS PGothic"/>
+                <a:ea typeface="MS PGothic"/>
+                <a:cs typeface="MS PGothic"/>
+              </a:defRPr>
+            </a:lvl3pPr>
+            <a:lvl4pPr algn="ctr" marL="0" indent="0">
+              <a:buNone/>
+              <a:defRPr sz="950" b="1">
+                <a:solidFill>
+                  <a:srgbClr val="000000"/>
+                </a:solidFill>
+                <a:latin typeface="MS PGothic"/>
+                <a:ea typeface="MS PGothic"/>
+                <a:cs typeface="MS PGothic"/>
+              </a:defRPr>
+            </a:lvl4pPr>
           </a:lstStyle>
           <a:p>
             <a:r>
@@ -3411,6 +4362,39 @@
                 <a:cs typeface="MS PGothic"/>
               </a:defRPr>
             </a:lvl1pPr>
+            <a:lvl2pPr algn="ctr" marL="0" indent="0">
+              <a:buNone/>
+              <a:defRPr sz="900" b="0">
+                <a:solidFill>
+                  <a:srgbClr val="595959"/>
+                </a:solidFill>
+                <a:latin typeface="MS PGothic"/>
+                <a:ea typeface="MS PGothic"/>
+                <a:cs typeface="MS PGothic"/>
+              </a:defRPr>
+            </a:lvl2pPr>
+            <a:lvl3pPr algn="ctr" marL="0" indent="0">
+              <a:buNone/>
+              <a:defRPr sz="800" b="0">
+                <a:solidFill>
+                  <a:srgbClr val="595959"/>
+                </a:solidFill>
+                <a:latin typeface="MS PGothic"/>
+                <a:ea typeface="MS PGothic"/>
+                <a:cs typeface="MS PGothic"/>
+              </a:defRPr>
+            </a:lvl3pPr>
+            <a:lvl4pPr algn="ctr" marL="0" indent="0">
+              <a:buNone/>
+              <a:defRPr sz="650" b="0">
+                <a:solidFill>
+                  <a:srgbClr val="595959"/>
+                </a:solidFill>
+                <a:latin typeface="MS PGothic"/>
+                <a:ea typeface="MS PGothic"/>
+                <a:cs typeface="MS PGothic"/>
+              </a:defRPr>
+            </a:lvl4pPr>
           </a:lstStyle>
           <a:p>
             <a:r>
@@ -3450,6 +4434,39 @@
                 <a:cs typeface="MS PGothic"/>
               </a:defRPr>
             </a:lvl1pPr>
+            <a:lvl2pPr algn="ctr" marL="0" indent="0">
+              <a:buNone/>
+              <a:defRPr sz="1300" b="1">
+                <a:solidFill>
+                  <a:srgbClr val="000000"/>
+                </a:solidFill>
+                <a:latin typeface="MS PGothic"/>
+                <a:ea typeface="MS PGothic"/>
+                <a:cs typeface="MS PGothic"/>
+              </a:defRPr>
+            </a:lvl2pPr>
+            <a:lvl3pPr algn="ctr" marL="0" indent="0">
+              <a:buNone/>
+              <a:defRPr sz="1150" b="1">
+                <a:solidFill>
+                  <a:srgbClr val="000000"/>
+                </a:solidFill>
+                <a:latin typeface="MS PGothic"/>
+                <a:ea typeface="MS PGothic"/>
+                <a:cs typeface="MS PGothic"/>
+              </a:defRPr>
+            </a:lvl3pPr>
+            <a:lvl4pPr algn="ctr" marL="0" indent="0">
+              <a:buNone/>
+              <a:defRPr sz="950" b="1">
+                <a:solidFill>
+                  <a:srgbClr val="000000"/>
+                </a:solidFill>
+                <a:latin typeface="MS PGothic"/>
+                <a:ea typeface="MS PGothic"/>
+                <a:cs typeface="MS PGothic"/>
+              </a:defRPr>
+            </a:lvl4pPr>
           </a:lstStyle>
           <a:p>
             <a:r>
@@ -3489,6 +4506,39 @@
                 <a:cs typeface="MS PGothic"/>
               </a:defRPr>
             </a:lvl1pPr>
+            <a:lvl2pPr algn="ctr" marL="0" indent="0">
+              <a:buNone/>
+              <a:defRPr sz="900" b="0">
+                <a:solidFill>
+                  <a:srgbClr val="595959"/>
+                </a:solidFill>
+                <a:latin typeface="MS PGothic"/>
+                <a:ea typeface="MS PGothic"/>
+                <a:cs typeface="MS PGothic"/>
+              </a:defRPr>
+            </a:lvl2pPr>
+            <a:lvl3pPr algn="ctr" marL="0" indent="0">
+              <a:buNone/>
+              <a:defRPr sz="800" b="0">
+                <a:solidFill>
+                  <a:srgbClr val="595959"/>
+                </a:solidFill>
+                <a:latin typeface="MS PGothic"/>
+                <a:ea typeface="MS PGothic"/>
+                <a:cs typeface="MS PGothic"/>
+              </a:defRPr>
+            </a:lvl3pPr>
+            <a:lvl4pPr algn="ctr" marL="0" indent="0">
+              <a:buNone/>
+              <a:defRPr sz="650" b="0">
+                <a:solidFill>
+                  <a:srgbClr val="595959"/>
+                </a:solidFill>
+                <a:latin typeface="MS PGothic"/>
+                <a:ea typeface="MS PGothic"/>
+                <a:cs typeface="MS PGothic"/>
+              </a:defRPr>
+            </a:lvl4pPr>
           </a:lstStyle>
           <a:p>
             <a:r>
@@ -3528,6 +4578,39 @@
                 <a:cs typeface="MS PGothic"/>
               </a:defRPr>
             </a:lvl1pPr>
+            <a:lvl2pPr algn="ctr" marL="0" indent="0">
+              <a:buNone/>
+              <a:defRPr sz="1300" b="1">
+                <a:solidFill>
+                  <a:srgbClr val="000000"/>
+                </a:solidFill>
+                <a:latin typeface="MS PGothic"/>
+                <a:ea typeface="MS PGothic"/>
+                <a:cs typeface="MS PGothic"/>
+              </a:defRPr>
+            </a:lvl2pPr>
+            <a:lvl3pPr algn="ctr" marL="0" indent="0">
+              <a:buNone/>
+              <a:defRPr sz="1150" b="1">
+                <a:solidFill>
+                  <a:srgbClr val="000000"/>
+                </a:solidFill>
+                <a:latin typeface="MS PGothic"/>
+                <a:ea typeface="MS PGothic"/>
+                <a:cs typeface="MS PGothic"/>
+              </a:defRPr>
+            </a:lvl3pPr>
+            <a:lvl4pPr algn="ctr" marL="0" indent="0">
+              <a:buNone/>
+              <a:defRPr sz="950" b="1">
+                <a:solidFill>
+                  <a:srgbClr val="000000"/>
+                </a:solidFill>
+                <a:latin typeface="MS PGothic"/>
+                <a:ea typeface="MS PGothic"/>
+                <a:cs typeface="MS PGothic"/>
+              </a:defRPr>
+            </a:lvl4pPr>
           </a:lstStyle>
           <a:p>
             <a:r>
@@ -3567,6 +4650,39 @@
                 <a:cs typeface="MS PGothic"/>
               </a:defRPr>
             </a:lvl1pPr>
+            <a:lvl2pPr algn="ctr" marL="0" indent="0">
+              <a:buNone/>
+              <a:defRPr sz="900" b="0">
+                <a:solidFill>
+                  <a:srgbClr val="595959"/>
+                </a:solidFill>
+                <a:latin typeface="MS PGothic"/>
+                <a:ea typeface="MS PGothic"/>
+                <a:cs typeface="MS PGothic"/>
+              </a:defRPr>
+            </a:lvl2pPr>
+            <a:lvl3pPr algn="ctr" marL="0" indent="0">
+              <a:buNone/>
+              <a:defRPr sz="800" b="0">
+                <a:solidFill>
+                  <a:srgbClr val="595959"/>
+                </a:solidFill>
+                <a:latin typeface="MS PGothic"/>
+                <a:ea typeface="MS PGothic"/>
+                <a:cs typeface="MS PGothic"/>
+              </a:defRPr>
+            </a:lvl3pPr>
+            <a:lvl4pPr algn="ctr" marL="0" indent="0">
+              <a:buNone/>
+              <a:defRPr sz="650" b="0">
+                <a:solidFill>
+                  <a:srgbClr val="595959"/>
+                </a:solidFill>
+                <a:latin typeface="MS PGothic"/>
+                <a:ea typeface="MS PGothic"/>
+                <a:cs typeface="MS PGothic"/>
+              </a:defRPr>
+            </a:lvl4pPr>
           </a:lstStyle>
           <a:p>
             <a:r>
@@ -3606,6 +4722,39 @@
                 <a:cs typeface="MS PGothic"/>
               </a:defRPr>
             </a:lvl1pPr>
+            <a:lvl2pPr algn="ctr" marL="0" indent="0">
+              <a:buNone/>
+              <a:defRPr sz="1300" b="1">
+                <a:solidFill>
+                  <a:srgbClr val="000000"/>
+                </a:solidFill>
+                <a:latin typeface="MS PGothic"/>
+                <a:ea typeface="MS PGothic"/>
+                <a:cs typeface="MS PGothic"/>
+              </a:defRPr>
+            </a:lvl2pPr>
+            <a:lvl3pPr algn="ctr" marL="0" indent="0">
+              <a:buNone/>
+              <a:defRPr sz="1150" b="1">
+                <a:solidFill>
+                  <a:srgbClr val="000000"/>
+                </a:solidFill>
+                <a:latin typeface="MS PGothic"/>
+                <a:ea typeface="MS PGothic"/>
+                <a:cs typeface="MS PGothic"/>
+              </a:defRPr>
+            </a:lvl3pPr>
+            <a:lvl4pPr algn="ctr" marL="0" indent="0">
+              <a:buNone/>
+              <a:defRPr sz="950" b="1">
+                <a:solidFill>
+                  <a:srgbClr val="000000"/>
+                </a:solidFill>
+                <a:latin typeface="MS PGothic"/>
+                <a:ea typeface="MS PGothic"/>
+                <a:cs typeface="MS PGothic"/>
+              </a:defRPr>
+            </a:lvl4pPr>
           </a:lstStyle>
           <a:p>
             <a:r>
@@ -3645,6 +4794,39 @@
                 <a:cs typeface="MS PGothic"/>
               </a:defRPr>
             </a:lvl1pPr>
+            <a:lvl2pPr algn="ctr" marL="0" indent="0">
+              <a:buNone/>
+              <a:defRPr sz="900" b="0">
+                <a:solidFill>
+                  <a:srgbClr val="595959"/>
+                </a:solidFill>
+                <a:latin typeface="MS PGothic"/>
+                <a:ea typeface="MS PGothic"/>
+                <a:cs typeface="MS PGothic"/>
+              </a:defRPr>
+            </a:lvl2pPr>
+            <a:lvl3pPr algn="ctr" marL="0" indent="0">
+              <a:buNone/>
+              <a:defRPr sz="800" b="0">
+                <a:solidFill>
+                  <a:srgbClr val="595959"/>
+                </a:solidFill>
+                <a:latin typeface="MS PGothic"/>
+                <a:ea typeface="MS PGothic"/>
+                <a:cs typeface="MS PGothic"/>
+              </a:defRPr>
+            </a:lvl3pPr>
+            <a:lvl4pPr algn="ctr" marL="0" indent="0">
+              <a:buNone/>
+              <a:defRPr sz="650" b="0">
+                <a:solidFill>
+                  <a:srgbClr val="595959"/>
+                </a:solidFill>
+                <a:latin typeface="MS PGothic"/>
+                <a:ea typeface="MS PGothic"/>
+                <a:cs typeface="MS PGothic"/>
+              </a:defRPr>
+            </a:lvl4pPr>
           </a:lstStyle>
           <a:p>
             <a:r>
@@ -3727,6 +4909,39 @@
                 <a:cs typeface="MS PGothic"/>
               </a:defRPr>
             </a:lvl1pPr>
+            <a:lvl2pPr algn="ctr" marL="0" indent="0">
+              <a:buNone/>
+              <a:defRPr sz="950" b="1">
+                <a:solidFill>
+                  <a:srgbClr val="FFFFFF"/>
+                </a:solidFill>
+                <a:latin typeface="MS PGothic"/>
+                <a:ea typeface="MS PGothic"/>
+                <a:cs typeface="MS PGothic"/>
+              </a:defRPr>
+            </a:lvl2pPr>
+            <a:lvl3pPr algn="ctr" marL="0" indent="0">
+              <a:buNone/>
+              <a:defRPr sz="850" b="1">
+                <a:solidFill>
+                  <a:srgbClr val="FFFFFF"/>
+                </a:solidFill>
+                <a:latin typeface="MS PGothic"/>
+                <a:ea typeface="MS PGothic"/>
+                <a:cs typeface="MS PGothic"/>
+              </a:defRPr>
+            </a:lvl3pPr>
+            <a:lvl4pPr algn="ctr" marL="0" indent="0">
+              <a:buNone/>
+              <a:defRPr sz="700" b="1">
+                <a:solidFill>
+                  <a:srgbClr val="FFFFFF"/>
+                </a:solidFill>
+                <a:latin typeface="MS PGothic"/>
+                <a:ea typeface="MS PGothic"/>
+                <a:cs typeface="MS PGothic"/>
+              </a:defRPr>
+            </a:lvl4pPr>
           </a:lstStyle>
           <a:p>
             <a:r>
@@ -3788,6 +5003,39 @@
                 <a:cs typeface="MS PGothic"/>
               </a:defRPr>
             </a:lvl1pPr>
+            <a:lvl2pPr algn="ctr" marL="0" indent="0">
+              <a:buNone/>
+              <a:defRPr sz="950" b="1">
+                <a:solidFill>
+                  <a:srgbClr val="FFFFFF"/>
+                </a:solidFill>
+                <a:latin typeface="MS PGothic"/>
+                <a:ea typeface="MS PGothic"/>
+                <a:cs typeface="MS PGothic"/>
+              </a:defRPr>
+            </a:lvl2pPr>
+            <a:lvl3pPr algn="ctr" marL="0" indent="0">
+              <a:buNone/>
+              <a:defRPr sz="850" b="1">
+                <a:solidFill>
+                  <a:srgbClr val="FFFFFF"/>
+                </a:solidFill>
+                <a:latin typeface="MS PGothic"/>
+                <a:ea typeface="MS PGothic"/>
+                <a:cs typeface="MS PGothic"/>
+              </a:defRPr>
+            </a:lvl3pPr>
+            <a:lvl4pPr algn="ctr" marL="0" indent="0">
+              <a:buNone/>
+              <a:defRPr sz="700" b="1">
+                <a:solidFill>
+                  <a:srgbClr val="FFFFFF"/>
+                </a:solidFill>
+                <a:latin typeface="MS PGothic"/>
+                <a:ea typeface="MS PGothic"/>
+                <a:cs typeface="MS PGothic"/>
+              </a:defRPr>
+            </a:lvl4pPr>
           </a:lstStyle>
           <a:p>
             <a:r>
@@ -3849,6 +5097,39 @@
                 <a:cs typeface="MS PGothic"/>
               </a:defRPr>
             </a:lvl1pPr>
+            <a:lvl2pPr algn="ctr" marL="0" indent="0">
+              <a:buNone/>
+              <a:defRPr sz="950" b="1">
+                <a:solidFill>
+                  <a:srgbClr val="FFFFFF"/>
+                </a:solidFill>
+                <a:latin typeface="MS PGothic"/>
+                <a:ea typeface="MS PGothic"/>
+                <a:cs typeface="MS PGothic"/>
+              </a:defRPr>
+            </a:lvl2pPr>
+            <a:lvl3pPr algn="ctr" marL="0" indent="0">
+              <a:buNone/>
+              <a:defRPr sz="850" b="1">
+                <a:solidFill>
+                  <a:srgbClr val="FFFFFF"/>
+                </a:solidFill>
+                <a:latin typeface="MS PGothic"/>
+                <a:ea typeface="MS PGothic"/>
+                <a:cs typeface="MS PGothic"/>
+              </a:defRPr>
+            </a:lvl3pPr>
+            <a:lvl4pPr algn="ctr" marL="0" indent="0">
+              <a:buNone/>
+              <a:defRPr sz="700" b="1">
+                <a:solidFill>
+                  <a:srgbClr val="FFFFFF"/>
+                </a:solidFill>
+                <a:latin typeface="MS PGothic"/>
+                <a:ea typeface="MS PGothic"/>
+                <a:cs typeface="MS PGothic"/>
+              </a:defRPr>
+            </a:lvl4pPr>
           </a:lstStyle>
           <a:p>
             <a:r>
@@ -3910,6 +5191,39 @@
                 <a:cs typeface="MS PGothic"/>
               </a:defRPr>
             </a:lvl1pPr>
+            <a:lvl2pPr algn="ctr" marL="0" indent="0">
+              <a:buNone/>
+              <a:defRPr sz="950" b="1">
+                <a:solidFill>
+                  <a:srgbClr val="FFFFFF"/>
+                </a:solidFill>
+                <a:latin typeface="MS PGothic"/>
+                <a:ea typeface="MS PGothic"/>
+                <a:cs typeface="MS PGothic"/>
+              </a:defRPr>
+            </a:lvl2pPr>
+            <a:lvl3pPr algn="ctr" marL="0" indent="0">
+              <a:buNone/>
+              <a:defRPr sz="850" b="1">
+                <a:solidFill>
+                  <a:srgbClr val="FFFFFF"/>
+                </a:solidFill>
+                <a:latin typeface="MS PGothic"/>
+                <a:ea typeface="MS PGothic"/>
+                <a:cs typeface="MS PGothic"/>
+              </a:defRPr>
+            </a:lvl3pPr>
+            <a:lvl4pPr algn="ctr" marL="0" indent="0">
+              <a:buNone/>
+              <a:defRPr sz="700" b="1">
+                <a:solidFill>
+                  <a:srgbClr val="FFFFFF"/>
+                </a:solidFill>
+                <a:latin typeface="MS PGothic"/>
+                <a:ea typeface="MS PGothic"/>
+                <a:cs typeface="MS PGothic"/>
+              </a:defRPr>
+            </a:lvl4pPr>
           </a:lstStyle>
           <a:p>
             <a:r>
@@ -3949,6 +5263,39 @@
                 <a:cs typeface="MS PGothic"/>
               </a:defRPr>
             </a:lvl1pPr>
+            <a:lvl2pPr algn="r" marL="0" indent="0">
+              <a:buNone/>
+              <a:defRPr sz="800" b="0">
+                <a:solidFill>
+                  <a:srgbClr val="FFFFFF"/>
+                </a:solidFill>
+                <a:latin typeface="MS PGothic"/>
+                <a:ea typeface="MS PGothic"/>
+                <a:cs typeface="MS PGothic"/>
+              </a:defRPr>
+            </a:lvl2pPr>
+            <a:lvl3pPr algn="r" marL="0" indent="0">
+              <a:buNone/>
+              <a:defRPr sz="700" b="0">
+                <a:solidFill>
+                  <a:srgbClr val="FFFFFF"/>
+                </a:solidFill>
+                <a:latin typeface="MS PGothic"/>
+                <a:ea typeface="MS PGothic"/>
+                <a:cs typeface="MS PGothic"/>
+              </a:defRPr>
+            </a:lvl3pPr>
+            <a:lvl4pPr algn="r" marL="0" indent="0">
+              <a:buNone/>
+              <a:defRPr sz="550" b="0">
+                <a:solidFill>
+                  <a:srgbClr val="FFFFFF"/>
+                </a:solidFill>
+                <a:latin typeface="MS PGothic"/>
+                <a:ea typeface="MS PGothic"/>
+                <a:cs typeface="MS PGothic"/>
+              </a:defRPr>
+            </a:lvl4pPr>
           </a:lstStyle>
           <a:p>
             <a:r>
@@ -3988,6 +5335,39 @@
                 <a:cs typeface="MS PGothic"/>
               </a:defRPr>
             </a:lvl1pPr>
+            <a:lvl2pPr algn="l" marL="0" indent="0">
+              <a:buNone/>
+              <a:defRPr sz="750" b="0">
+                <a:solidFill>
+                  <a:srgbClr val="595959"/>
+                </a:solidFill>
+                <a:latin typeface="MS PGothic"/>
+                <a:ea typeface="MS PGothic"/>
+                <a:cs typeface="MS PGothic"/>
+              </a:defRPr>
+            </a:lvl2pPr>
+            <a:lvl3pPr algn="l" marL="0" indent="0">
+              <a:buNone/>
+              <a:defRPr sz="650" b="0">
+                <a:solidFill>
+                  <a:srgbClr val="595959"/>
+                </a:solidFill>
+                <a:latin typeface="MS PGothic"/>
+                <a:ea typeface="MS PGothic"/>
+                <a:cs typeface="MS PGothic"/>
+              </a:defRPr>
+            </a:lvl3pPr>
+            <a:lvl4pPr algn="l" marL="0" indent="0">
+              <a:buNone/>
+              <a:defRPr sz="550" b="0">
+                <a:solidFill>
+                  <a:srgbClr val="595959"/>
+                </a:solidFill>
+                <a:latin typeface="MS PGothic"/>
+                <a:ea typeface="MS PGothic"/>
+                <a:cs typeface="MS PGothic"/>
+              </a:defRPr>
+            </a:lvl4pPr>
           </a:lstStyle>
           <a:p>
             <a:r>
@@ -4365,6 +5745,39 @@
                 <a:cs typeface="MS PGothic"/>
               </a:defRPr>
             </a:lvl1pPr>
+            <a:lvl2pPr algn="l" marL="0" indent="0">
+              <a:buNone/>
+              <a:defRPr sz="1050" b="1">
+                <a:solidFill>
+                  <a:srgbClr val="FFFFFF"/>
+                </a:solidFill>
+                <a:latin typeface="MS PGothic"/>
+                <a:ea typeface="MS PGothic"/>
+                <a:cs typeface="MS PGothic"/>
+              </a:defRPr>
+            </a:lvl2pPr>
+            <a:lvl3pPr algn="l" marL="0" indent="0">
+              <a:buNone/>
+              <a:defRPr sz="900" b="1">
+                <a:solidFill>
+                  <a:srgbClr val="FFFFFF"/>
+                </a:solidFill>
+                <a:latin typeface="MS PGothic"/>
+                <a:ea typeface="MS PGothic"/>
+                <a:cs typeface="MS PGothic"/>
+              </a:defRPr>
+            </a:lvl3pPr>
+            <a:lvl4pPr algn="l" marL="0" indent="0">
+              <a:buNone/>
+              <a:defRPr sz="750" b="1">
+                <a:solidFill>
+                  <a:srgbClr val="FFFFFF"/>
+                </a:solidFill>
+                <a:latin typeface="MS PGothic"/>
+                <a:ea typeface="MS PGothic"/>
+                <a:cs typeface="MS PGothic"/>
+              </a:defRPr>
+            </a:lvl4pPr>
           </a:lstStyle>
           <a:p>
             <a:r>
@@ -4404,6 +5817,39 @@
                 <a:cs typeface="MS PGothic"/>
               </a:defRPr>
             </a:lvl1pPr>
+            <a:lvl2pPr algn="l" marL="0" indent="0">
+              <a:buNone/>
+              <a:defRPr sz="900" b="0">
+                <a:solidFill>
+                  <a:srgbClr val="1A1A1A"/>
+                </a:solidFill>
+                <a:latin typeface="MS PGothic"/>
+                <a:ea typeface="MS PGothic"/>
+                <a:cs typeface="MS PGothic"/>
+              </a:defRPr>
+            </a:lvl2pPr>
+            <a:lvl3pPr algn="l" marL="0" indent="0">
+              <a:buNone/>
+              <a:defRPr sz="800" b="0">
+                <a:solidFill>
+                  <a:srgbClr val="1A1A1A"/>
+                </a:solidFill>
+                <a:latin typeface="MS PGothic"/>
+                <a:ea typeface="MS PGothic"/>
+                <a:cs typeface="MS PGothic"/>
+              </a:defRPr>
+            </a:lvl3pPr>
+            <a:lvl4pPr algn="l" marL="0" indent="0">
+              <a:buNone/>
+              <a:defRPr sz="650" b="0">
+                <a:solidFill>
+                  <a:srgbClr val="1A1A1A"/>
+                </a:solidFill>
+                <a:latin typeface="MS PGothic"/>
+                <a:ea typeface="MS PGothic"/>
+                <a:cs typeface="MS PGothic"/>
+              </a:defRPr>
+            </a:lvl4pPr>
           </a:lstStyle>
           <a:p>
             <a:r>
@@ -4443,6 +5889,39 @@
                 <a:cs typeface="MS PGothic"/>
               </a:defRPr>
             </a:lvl1pPr>
+            <a:lvl2pPr algn="l" marL="0" indent="0">
+              <a:buNone/>
+              <a:defRPr sz="1050" b="1">
+                <a:solidFill>
+                  <a:srgbClr val="FFFFFF"/>
+                </a:solidFill>
+                <a:latin typeface="MS PGothic"/>
+                <a:ea typeface="MS PGothic"/>
+                <a:cs typeface="MS PGothic"/>
+              </a:defRPr>
+            </a:lvl2pPr>
+            <a:lvl3pPr algn="l" marL="0" indent="0">
+              <a:buNone/>
+              <a:defRPr sz="900" b="1">
+                <a:solidFill>
+                  <a:srgbClr val="FFFFFF"/>
+                </a:solidFill>
+                <a:latin typeface="MS PGothic"/>
+                <a:ea typeface="MS PGothic"/>
+                <a:cs typeface="MS PGothic"/>
+              </a:defRPr>
+            </a:lvl3pPr>
+            <a:lvl4pPr algn="l" marL="0" indent="0">
+              <a:buNone/>
+              <a:defRPr sz="750" b="1">
+                <a:solidFill>
+                  <a:srgbClr val="FFFFFF"/>
+                </a:solidFill>
+                <a:latin typeface="MS PGothic"/>
+                <a:ea typeface="MS PGothic"/>
+                <a:cs typeface="MS PGothic"/>
+              </a:defRPr>
+            </a:lvl4pPr>
           </a:lstStyle>
           <a:p>
             <a:r>
@@ -4482,6 +5961,39 @@
                 <a:cs typeface="MS PGothic"/>
               </a:defRPr>
             </a:lvl1pPr>
+            <a:lvl2pPr algn="l" marL="0" indent="0">
+              <a:buNone/>
+              <a:defRPr sz="900" b="0">
+                <a:solidFill>
+                  <a:srgbClr val="1A1A1A"/>
+                </a:solidFill>
+                <a:latin typeface="MS PGothic"/>
+                <a:ea typeface="MS PGothic"/>
+                <a:cs typeface="MS PGothic"/>
+              </a:defRPr>
+            </a:lvl2pPr>
+            <a:lvl3pPr algn="l" marL="0" indent="0">
+              <a:buNone/>
+              <a:defRPr sz="800" b="0">
+                <a:solidFill>
+                  <a:srgbClr val="1A1A1A"/>
+                </a:solidFill>
+                <a:latin typeface="MS PGothic"/>
+                <a:ea typeface="MS PGothic"/>
+                <a:cs typeface="MS PGothic"/>
+              </a:defRPr>
+            </a:lvl3pPr>
+            <a:lvl4pPr algn="l" marL="0" indent="0">
+              <a:buNone/>
+              <a:defRPr sz="650" b="0">
+                <a:solidFill>
+                  <a:srgbClr val="1A1A1A"/>
+                </a:solidFill>
+                <a:latin typeface="MS PGothic"/>
+                <a:ea typeface="MS PGothic"/>
+                <a:cs typeface="MS PGothic"/>
+              </a:defRPr>
+            </a:lvl4pPr>
           </a:lstStyle>
           <a:p>
             <a:r>
@@ -4542,6 +6054,39 @@
                 <a:cs typeface="MS PGothic"/>
               </a:defRPr>
             </a:lvl1pPr>
+            <a:lvl2pPr algn="r" marL="0" indent="0">
+              <a:buNone/>
+              <a:defRPr sz="800" b="0">
+                <a:solidFill>
+                  <a:srgbClr val="FFFFFF"/>
+                </a:solidFill>
+                <a:latin typeface="MS PGothic"/>
+                <a:ea typeface="MS PGothic"/>
+                <a:cs typeface="MS PGothic"/>
+              </a:defRPr>
+            </a:lvl2pPr>
+            <a:lvl3pPr algn="r" marL="0" indent="0">
+              <a:buNone/>
+              <a:defRPr sz="700" b="0">
+                <a:solidFill>
+                  <a:srgbClr val="FFFFFF"/>
+                </a:solidFill>
+                <a:latin typeface="MS PGothic"/>
+                <a:ea typeface="MS PGothic"/>
+                <a:cs typeface="MS PGothic"/>
+              </a:defRPr>
+            </a:lvl3pPr>
+            <a:lvl4pPr algn="r" marL="0" indent="0">
+              <a:buNone/>
+              <a:defRPr sz="550" b="0">
+                <a:solidFill>
+                  <a:srgbClr val="FFFFFF"/>
+                </a:solidFill>
+                <a:latin typeface="MS PGothic"/>
+                <a:ea typeface="MS PGothic"/>
+                <a:cs typeface="MS PGothic"/>
+              </a:defRPr>
+            </a:lvl4pPr>
           </a:lstStyle>
           <a:p>
             <a:r>
@@ -4581,6 +6126,39 @@
                 <a:cs typeface="MS PGothic"/>
               </a:defRPr>
             </a:lvl1pPr>
+            <a:lvl2pPr algn="l" marL="0" indent="0">
+              <a:buNone/>
+              <a:defRPr sz="750" b="0">
+                <a:solidFill>
+                  <a:srgbClr val="595959"/>
+                </a:solidFill>
+                <a:latin typeface="MS PGothic"/>
+                <a:ea typeface="MS PGothic"/>
+                <a:cs typeface="MS PGothic"/>
+              </a:defRPr>
+            </a:lvl2pPr>
+            <a:lvl3pPr algn="l" marL="0" indent="0">
+              <a:buNone/>
+              <a:defRPr sz="650" b="0">
+                <a:solidFill>
+                  <a:srgbClr val="595959"/>
+                </a:solidFill>
+                <a:latin typeface="MS PGothic"/>
+                <a:ea typeface="MS PGothic"/>
+                <a:cs typeface="MS PGothic"/>
+              </a:defRPr>
+            </a:lvl3pPr>
+            <a:lvl4pPr algn="l" marL="0" indent="0">
+              <a:buNone/>
+              <a:defRPr sz="550" b="0">
+                <a:solidFill>
+                  <a:srgbClr val="595959"/>
+                </a:solidFill>
+                <a:latin typeface="MS PGothic"/>
+                <a:ea typeface="MS PGothic"/>
+                <a:cs typeface="MS PGothic"/>
+              </a:defRPr>
+            </a:lvl4pPr>
           </a:lstStyle>
           <a:p>
             <a:r>
@@ -4823,6 +6401,39 @@
                 <a:cs typeface="MS PGothic"/>
               </a:defRPr>
             </a:lvl1pPr>
+            <a:lvl2pPr algn="r" marL="0" indent="0">
+              <a:buNone/>
+              <a:defRPr sz="800" b="0">
+                <a:solidFill>
+                  <a:srgbClr val="FFFFFF"/>
+                </a:solidFill>
+                <a:latin typeface="MS PGothic"/>
+                <a:ea typeface="MS PGothic"/>
+                <a:cs typeface="MS PGothic"/>
+              </a:defRPr>
+            </a:lvl2pPr>
+            <a:lvl3pPr algn="r" marL="0" indent="0">
+              <a:buNone/>
+              <a:defRPr sz="700" b="0">
+                <a:solidFill>
+                  <a:srgbClr val="FFFFFF"/>
+                </a:solidFill>
+                <a:latin typeface="MS PGothic"/>
+                <a:ea typeface="MS PGothic"/>
+                <a:cs typeface="MS PGothic"/>
+              </a:defRPr>
+            </a:lvl3pPr>
+            <a:lvl4pPr algn="r" marL="0" indent="0">
+              <a:buNone/>
+              <a:defRPr sz="550" b="0">
+                <a:solidFill>
+                  <a:srgbClr val="FFFFFF"/>
+                </a:solidFill>
+                <a:latin typeface="MS PGothic"/>
+                <a:ea typeface="MS PGothic"/>
+                <a:cs typeface="MS PGothic"/>
+              </a:defRPr>
+            </a:lvl4pPr>
           </a:lstStyle>
           <a:p>
             <a:r>
@@ -4862,6 +6473,39 @@
                 <a:cs typeface="MS PGothic"/>
               </a:defRPr>
             </a:lvl1pPr>
+            <a:lvl2pPr algn="l" marL="0" indent="0">
+              <a:buNone/>
+              <a:defRPr sz="750" b="0">
+                <a:solidFill>
+                  <a:srgbClr val="595959"/>
+                </a:solidFill>
+                <a:latin typeface="MS PGothic"/>
+                <a:ea typeface="MS PGothic"/>
+                <a:cs typeface="MS PGothic"/>
+              </a:defRPr>
+            </a:lvl2pPr>
+            <a:lvl3pPr algn="l" marL="0" indent="0">
+              <a:buNone/>
+              <a:defRPr sz="650" b="0">
+                <a:solidFill>
+                  <a:srgbClr val="595959"/>
+                </a:solidFill>
+                <a:latin typeface="MS PGothic"/>
+                <a:ea typeface="MS PGothic"/>
+                <a:cs typeface="MS PGothic"/>
+              </a:defRPr>
+            </a:lvl3pPr>
+            <a:lvl4pPr algn="l" marL="0" indent="0">
+              <a:buNone/>
+              <a:defRPr sz="550" b="0">
+                <a:solidFill>
+                  <a:srgbClr val="595959"/>
+                </a:solidFill>
+                <a:latin typeface="MS PGothic"/>
+                <a:ea typeface="MS PGothic"/>
+                <a:cs typeface="MS PGothic"/>
+              </a:defRPr>
+            </a:lvl4pPr>
           </a:lstStyle>
           <a:p>
             <a:r>
@@ -4923,6 +6567,39 @@
                 <a:cs typeface="MS PGothic"/>
               </a:defRPr>
             </a:lvl1pPr>
+            <a:lvl2pPr algn="l" marL="0" indent="0">
+              <a:buNone/>
+              <a:defRPr sz="1050" b="1">
+                <a:solidFill>
+                  <a:srgbClr val="1F3864"/>
+                </a:solidFill>
+                <a:latin typeface="MS PGothic"/>
+                <a:ea typeface="MS PGothic"/>
+                <a:cs typeface="MS PGothic"/>
+              </a:defRPr>
+            </a:lvl2pPr>
+            <a:lvl3pPr algn="l" marL="0" indent="0">
+              <a:buNone/>
+              <a:defRPr sz="900" b="1">
+                <a:solidFill>
+                  <a:srgbClr val="1F3864"/>
+                </a:solidFill>
+                <a:latin typeface="MS PGothic"/>
+                <a:ea typeface="MS PGothic"/>
+                <a:cs typeface="MS PGothic"/>
+              </a:defRPr>
+            </a:lvl3pPr>
+            <a:lvl4pPr algn="l" marL="0" indent="0">
+              <a:buNone/>
+              <a:defRPr sz="750" b="1">
+                <a:solidFill>
+                  <a:srgbClr val="1F3864"/>
+                </a:solidFill>
+                <a:latin typeface="MS PGothic"/>
+                <a:ea typeface="MS PGothic"/>
+                <a:cs typeface="MS PGothic"/>
+              </a:defRPr>
+            </a:lvl4pPr>
           </a:lstStyle>
           <a:p>
             <a:r>
@@ -4962,6 +6639,39 @@
                 <a:cs typeface="MS PGothic"/>
               </a:defRPr>
             </a:lvl1pPr>
+            <a:lvl2pPr algn="l" marL="0" indent="0">
+              <a:buNone/>
+              <a:defRPr sz="900" b="0">
+                <a:solidFill>
+                  <a:srgbClr val="000000"/>
+                </a:solidFill>
+                <a:latin typeface="MS PGothic"/>
+                <a:ea typeface="MS PGothic"/>
+                <a:cs typeface="MS PGothic"/>
+              </a:defRPr>
+            </a:lvl2pPr>
+            <a:lvl3pPr algn="l" marL="0" indent="0">
+              <a:buNone/>
+              <a:defRPr sz="800" b="0">
+                <a:solidFill>
+                  <a:srgbClr val="000000"/>
+                </a:solidFill>
+                <a:latin typeface="MS PGothic"/>
+                <a:ea typeface="MS PGothic"/>
+                <a:cs typeface="MS PGothic"/>
+              </a:defRPr>
+            </a:lvl3pPr>
+            <a:lvl4pPr algn="l" marL="0" indent="0">
+              <a:buNone/>
+              <a:defRPr sz="650" b="0">
+                <a:solidFill>
+                  <a:srgbClr val="000000"/>
+                </a:solidFill>
+                <a:latin typeface="MS PGothic"/>
+                <a:ea typeface="MS PGothic"/>
+                <a:cs typeface="MS PGothic"/>
+              </a:defRPr>
+            </a:lvl4pPr>
           </a:lstStyle>
           <a:p>
             <a:r>
@@ -5023,6 +6733,39 @@
                 <a:cs typeface="MS PGothic"/>
               </a:defRPr>
             </a:lvl1pPr>
+            <a:lvl2pPr algn="l" marL="0" indent="0">
+              <a:buNone/>
+              <a:defRPr sz="1050" b="1">
+                <a:solidFill>
+                  <a:srgbClr val="1F3864"/>
+                </a:solidFill>
+                <a:latin typeface="MS PGothic"/>
+                <a:ea typeface="MS PGothic"/>
+                <a:cs typeface="MS PGothic"/>
+              </a:defRPr>
+            </a:lvl2pPr>
+            <a:lvl3pPr algn="l" marL="0" indent="0">
+              <a:buNone/>
+              <a:defRPr sz="900" b="1">
+                <a:solidFill>
+                  <a:srgbClr val="1F3864"/>
+                </a:solidFill>
+                <a:latin typeface="MS PGothic"/>
+                <a:ea typeface="MS PGothic"/>
+                <a:cs typeface="MS PGothic"/>
+              </a:defRPr>
+            </a:lvl3pPr>
+            <a:lvl4pPr algn="l" marL="0" indent="0">
+              <a:buNone/>
+              <a:defRPr sz="750" b="1">
+                <a:solidFill>
+                  <a:srgbClr val="1F3864"/>
+                </a:solidFill>
+                <a:latin typeface="MS PGothic"/>
+                <a:ea typeface="MS PGothic"/>
+                <a:cs typeface="MS PGothic"/>
+              </a:defRPr>
+            </a:lvl4pPr>
           </a:lstStyle>
           <a:p>
             <a:r>
@@ -5062,6 +6805,39 @@
                 <a:cs typeface="MS PGothic"/>
               </a:defRPr>
             </a:lvl1pPr>
+            <a:lvl2pPr algn="l" marL="0" indent="0">
+              <a:buNone/>
+              <a:defRPr sz="900" b="0">
+                <a:solidFill>
+                  <a:srgbClr val="000000"/>
+                </a:solidFill>
+                <a:latin typeface="MS PGothic"/>
+                <a:ea typeface="MS PGothic"/>
+                <a:cs typeface="MS PGothic"/>
+              </a:defRPr>
+            </a:lvl2pPr>
+            <a:lvl3pPr algn="l" marL="0" indent="0">
+              <a:buNone/>
+              <a:defRPr sz="800" b="0">
+                <a:solidFill>
+                  <a:srgbClr val="000000"/>
+                </a:solidFill>
+                <a:latin typeface="MS PGothic"/>
+                <a:ea typeface="MS PGothic"/>
+                <a:cs typeface="MS PGothic"/>
+              </a:defRPr>
+            </a:lvl3pPr>
+            <a:lvl4pPr algn="l" marL="0" indent="0">
+              <a:buNone/>
+              <a:defRPr sz="650" b="0">
+                <a:solidFill>
+                  <a:srgbClr val="000000"/>
+                </a:solidFill>
+                <a:latin typeface="MS PGothic"/>
+                <a:ea typeface="MS PGothic"/>
+                <a:cs typeface="MS PGothic"/>
+              </a:defRPr>
+            </a:lvl4pPr>
           </a:lstStyle>
           <a:p>
             <a:r>
@@ -5123,6 +6899,39 @@
                 <a:cs typeface="MS PGothic"/>
               </a:defRPr>
             </a:lvl1pPr>
+            <a:lvl2pPr algn="l" marL="0" indent="0">
+              <a:buNone/>
+              <a:defRPr sz="1050" b="1">
+                <a:solidFill>
+                  <a:srgbClr val="1F3864"/>
+                </a:solidFill>
+                <a:latin typeface="MS PGothic"/>
+                <a:ea typeface="MS PGothic"/>
+                <a:cs typeface="MS PGothic"/>
+              </a:defRPr>
+            </a:lvl2pPr>
+            <a:lvl3pPr algn="l" marL="0" indent="0">
+              <a:buNone/>
+              <a:defRPr sz="900" b="1">
+                <a:solidFill>
+                  <a:srgbClr val="1F3864"/>
+                </a:solidFill>
+                <a:latin typeface="MS PGothic"/>
+                <a:ea typeface="MS PGothic"/>
+                <a:cs typeface="MS PGothic"/>
+              </a:defRPr>
+            </a:lvl3pPr>
+            <a:lvl4pPr algn="l" marL="0" indent="0">
+              <a:buNone/>
+              <a:defRPr sz="750" b="1">
+                <a:solidFill>
+                  <a:srgbClr val="1F3864"/>
+                </a:solidFill>
+                <a:latin typeface="MS PGothic"/>
+                <a:ea typeface="MS PGothic"/>
+                <a:cs typeface="MS PGothic"/>
+              </a:defRPr>
+            </a:lvl4pPr>
           </a:lstStyle>
           <a:p>
             <a:r>
@@ -5162,6 +6971,39 @@
                 <a:cs typeface="MS PGothic"/>
               </a:defRPr>
             </a:lvl1pPr>
+            <a:lvl2pPr algn="l" marL="0" indent="0">
+              <a:buNone/>
+              <a:defRPr sz="900" b="0">
+                <a:solidFill>
+                  <a:srgbClr val="000000"/>
+                </a:solidFill>
+                <a:latin typeface="MS PGothic"/>
+                <a:ea typeface="MS PGothic"/>
+                <a:cs typeface="MS PGothic"/>
+              </a:defRPr>
+            </a:lvl2pPr>
+            <a:lvl3pPr algn="l" marL="0" indent="0">
+              <a:buNone/>
+              <a:defRPr sz="800" b="0">
+                <a:solidFill>
+                  <a:srgbClr val="000000"/>
+                </a:solidFill>
+                <a:latin typeface="MS PGothic"/>
+                <a:ea typeface="MS PGothic"/>
+                <a:cs typeface="MS PGothic"/>
+              </a:defRPr>
+            </a:lvl3pPr>
+            <a:lvl4pPr algn="l" marL="0" indent="0">
+              <a:buNone/>
+              <a:defRPr sz="650" b="0">
+                <a:solidFill>
+                  <a:srgbClr val="000000"/>
+                </a:solidFill>
+                <a:latin typeface="MS PGothic"/>
+                <a:ea typeface="MS PGothic"/>
+                <a:cs typeface="MS PGothic"/>
+              </a:defRPr>
+            </a:lvl4pPr>
           </a:lstStyle>
           <a:p>
             <a:r>
@@ -5606,28 +7448,28 @@
           <a:bodyPr anchor="t"/>
           <a:lstStyle>
             <a:lvl2pPr>
-              <a:defRPr sz="2400"/>
+              <a:defRPr sz="850"/>
             </a:lvl2pPr>
             <a:lvl3pPr>
-              <a:defRPr sz="2000"/>
+              <a:defRPr sz="700"/>
             </a:lvl3pPr>
             <a:lvl4pPr>
-              <a:defRPr sz="1800"/>
+              <a:defRPr sz="600"/>
             </a:lvl4pPr>
             <a:lvl5pPr>
-              <a:defRPr sz="1800"/>
+              <a:defRPr sz="600"/>
             </a:lvl5pPr>
             <a:lvl6pPr>
-              <a:defRPr sz="1800"/>
+              <a:defRPr sz="600"/>
             </a:lvl6pPr>
             <a:lvl7pPr>
-              <a:defRPr sz="1800"/>
+              <a:defRPr sz="600"/>
             </a:lvl7pPr>
             <a:lvl8pPr>
-              <a:defRPr sz="1800"/>
+              <a:defRPr sz="600"/>
             </a:lvl8pPr>
             <a:lvl9pPr>
-              <a:defRPr sz="1800"/>
+              <a:defRPr sz="600"/>
             </a:lvl9pPr>
             <a:lvl1pPr algn="l">
               <a:defRPr sz="1100" b="1">
@@ -5695,28 +7537,28 @@
           <a:bodyPr anchor="t"/>
           <a:lstStyle>
             <a:lvl2pPr>
-              <a:defRPr sz="2400"/>
+              <a:defRPr sz="800"/>
             </a:lvl2pPr>
             <a:lvl3pPr>
-              <a:defRPr sz="2000"/>
+              <a:defRPr sz="650"/>
             </a:lvl3pPr>
             <a:lvl4pPr>
-              <a:defRPr sz="1800"/>
+              <a:defRPr sz="600"/>
             </a:lvl4pPr>
             <a:lvl5pPr>
-              <a:defRPr sz="1800"/>
+              <a:defRPr sz="600"/>
             </a:lvl5pPr>
             <a:lvl6pPr>
-              <a:defRPr sz="1800"/>
+              <a:defRPr sz="600"/>
             </a:lvl6pPr>
             <a:lvl7pPr>
-              <a:defRPr sz="1800"/>
+              <a:defRPr sz="600"/>
             </a:lvl7pPr>
             <a:lvl8pPr>
-              <a:defRPr sz="1800"/>
+              <a:defRPr sz="600"/>
             </a:lvl8pPr>
             <a:lvl9pPr>
-              <a:defRPr sz="1800"/>
+              <a:defRPr sz="600"/>
             </a:lvl9pPr>
             <a:lvl1pPr algn="l">
               <a:defRPr sz="1050" b="0">
@@ -5880,6 +7722,39 @@
                 <a:cs typeface="MS PGothic"/>
               </a:defRPr>
             </a:lvl1pPr>
+            <a:lvl2pPr algn="r" marL="0" indent="0">
+              <a:buNone/>
+              <a:defRPr sz="800" b="0">
+                <a:solidFill>
+                  <a:srgbClr val="FFFFFF"/>
+                </a:solidFill>
+                <a:latin typeface="MS PGothic"/>
+                <a:ea typeface="MS PGothic"/>
+                <a:cs typeface="MS PGothic"/>
+              </a:defRPr>
+            </a:lvl2pPr>
+            <a:lvl3pPr algn="r" marL="0" indent="0">
+              <a:buNone/>
+              <a:defRPr sz="700" b="0">
+                <a:solidFill>
+                  <a:srgbClr val="FFFFFF"/>
+                </a:solidFill>
+                <a:latin typeface="MS PGothic"/>
+                <a:ea typeface="MS PGothic"/>
+                <a:cs typeface="MS PGothic"/>
+              </a:defRPr>
+            </a:lvl3pPr>
+            <a:lvl4pPr algn="r" marL="0" indent="0">
+              <a:buNone/>
+              <a:defRPr sz="550" b="0">
+                <a:solidFill>
+                  <a:srgbClr val="FFFFFF"/>
+                </a:solidFill>
+                <a:latin typeface="MS PGothic"/>
+                <a:ea typeface="MS PGothic"/>
+                <a:cs typeface="MS PGothic"/>
+              </a:defRPr>
+            </a:lvl4pPr>
           </a:lstStyle>
           <a:p>
             <a:r>
@@ -5919,6 +7794,39 @@
                 <a:cs typeface="MS PGothic"/>
               </a:defRPr>
             </a:lvl1pPr>
+            <a:lvl2pPr algn="l" marL="0" indent="0">
+              <a:buNone/>
+              <a:defRPr sz="750" b="0">
+                <a:solidFill>
+                  <a:srgbClr val="595959"/>
+                </a:solidFill>
+                <a:latin typeface="MS PGothic"/>
+                <a:ea typeface="MS PGothic"/>
+                <a:cs typeface="MS PGothic"/>
+              </a:defRPr>
+            </a:lvl2pPr>
+            <a:lvl3pPr algn="l" marL="0" indent="0">
+              <a:buNone/>
+              <a:defRPr sz="650" b="0">
+                <a:solidFill>
+                  <a:srgbClr val="595959"/>
+                </a:solidFill>
+                <a:latin typeface="MS PGothic"/>
+                <a:ea typeface="MS PGothic"/>
+                <a:cs typeface="MS PGothic"/>
+              </a:defRPr>
+            </a:lvl3pPr>
+            <a:lvl4pPr algn="l" marL="0" indent="0">
+              <a:buNone/>
+              <a:defRPr sz="550" b="0">
+                <a:solidFill>
+                  <a:srgbClr val="595959"/>
+                </a:solidFill>
+                <a:latin typeface="MS PGothic"/>
+                <a:ea typeface="MS PGothic"/>
+                <a:cs typeface="MS PGothic"/>
+              </a:defRPr>
+            </a:lvl4pPr>
           </a:lstStyle>
           <a:p>
             <a:r>
@@ -6204,35 +8112,35 @@
           <a:lstStyle>
             <a:lvl2pPr marL="457200" indent="0">
               <a:buNone/>
-              <a:defRPr sz="2000" b="1"/>
+              <a:defRPr sz="750" b="1"/>
             </a:lvl2pPr>
             <a:lvl3pPr marL="914400" indent="0">
               <a:buNone/>
-              <a:defRPr sz="1800" b="1"/>
+              <a:defRPr sz="700" b="1"/>
             </a:lvl3pPr>
             <a:lvl4pPr marL="1371600" indent="0">
               <a:buNone/>
-              <a:defRPr sz="1600" b="1"/>
+              <a:defRPr sz="600" b="1"/>
             </a:lvl4pPr>
             <a:lvl5pPr marL="1828800" indent="0">
               <a:buNone/>
-              <a:defRPr sz="1600" b="1"/>
+              <a:defRPr sz="600" b="1"/>
             </a:lvl5pPr>
             <a:lvl6pPr marL="2286000" indent="0">
               <a:buNone/>
-              <a:defRPr sz="1600" b="1"/>
+              <a:defRPr sz="600" b="1"/>
             </a:lvl6pPr>
             <a:lvl7pPr marL="2743200" indent="0">
               <a:buNone/>
-              <a:defRPr sz="1600" b="1"/>
+              <a:defRPr sz="600" b="1"/>
             </a:lvl7pPr>
             <a:lvl8pPr marL="3200400" indent="0">
               <a:buNone/>
-              <a:defRPr sz="1600" b="1"/>
+              <a:defRPr sz="600" b="1"/>
             </a:lvl8pPr>
             <a:lvl9pPr marL="3657600" indent="0">
               <a:buNone/>
-              <a:defRPr sz="1600" b="1"/>
+              <a:defRPr sz="600" b="1"/>
             </a:lvl9pPr>
             <a:lvl1pPr algn="l" indent="0" marL="0">
               <a:buNone/>
@@ -6272,28 +8180,28 @@
           <a:bodyPr anchor="t"/>
           <a:lstStyle>
             <a:lvl2pPr>
-              <a:defRPr sz="2000"/>
+              <a:defRPr sz="650"/>
             </a:lvl2pPr>
             <a:lvl3pPr>
-              <a:defRPr sz="1800"/>
+              <a:defRPr sz="600"/>
             </a:lvl3pPr>
             <a:lvl4pPr>
-              <a:defRPr sz="1600"/>
+              <a:defRPr sz="550"/>
             </a:lvl4pPr>
             <a:lvl5pPr>
-              <a:defRPr sz="1600"/>
+              <a:defRPr sz="550"/>
             </a:lvl5pPr>
             <a:lvl6pPr>
-              <a:defRPr sz="1600"/>
+              <a:defRPr sz="550"/>
             </a:lvl6pPr>
             <a:lvl7pPr>
-              <a:defRPr sz="1600"/>
+              <a:defRPr sz="550"/>
             </a:lvl7pPr>
             <a:lvl8pPr>
-              <a:defRPr sz="1600"/>
+              <a:defRPr sz="550"/>
             </a:lvl8pPr>
             <a:lvl9pPr>
-              <a:defRPr sz="1600"/>
+              <a:defRPr sz="550"/>
             </a:lvl9pPr>
             <a:lvl1pPr algn="l">
               <a:defRPr sz="1050" b="0">
@@ -6362,35 +8270,35 @@
           <a:lstStyle>
             <a:lvl2pPr marL="457200" indent="0">
               <a:buNone/>
-              <a:defRPr sz="2000" b="1"/>
+              <a:defRPr sz="100" b="1"/>
             </a:lvl2pPr>
             <a:lvl3pPr marL="914400" indent="0">
               <a:buNone/>
-              <a:defRPr sz="1800" b="1"/>
+              <a:defRPr sz="100" b="1"/>
             </a:lvl3pPr>
             <a:lvl4pPr marL="1371600" indent="0">
               <a:buNone/>
-              <a:defRPr sz="1600" b="1"/>
+              <a:defRPr sz="100" b="1"/>
             </a:lvl4pPr>
             <a:lvl5pPr marL="1828800" indent="0">
               <a:buNone/>
-              <a:defRPr sz="1600" b="1"/>
+              <a:defRPr sz="100" b="1"/>
             </a:lvl5pPr>
             <a:lvl6pPr marL="2286000" indent="0">
               <a:buNone/>
-              <a:defRPr sz="1600" b="1"/>
+              <a:defRPr sz="100" b="1"/>
             </a:lvl6pPr>
             <a:lvl7pPr marL="2743200" indent="0">
               <a:buNone/>
-              <a:defRPr sz="1600" b="1"/>
+              <a:defRPr sz="100" b="1"/>
             </a:lvl7pPr>
             <a:lvl8pPr marL="3200400" indent="0">
               <a:buNone/>
-              <a:defRPr sz="1600" b="1"/>
+              <a:defRPr sz="100" b="1"/>
             </a:lvl8pPr>
             <a:lvl9pPr marL="3657600" indent="0">
               <a:buNone/>
-              <a:defRPr sz="1600" b="1"/>
+              <a:defRPr sz="100" b="1"/>
             </a:lvl9pPr>
             <a:lvl1pPr algn="l" indent="0" marL="0">
               <a:buNone/>
@@ -6430,28 +8338,28 @@
           <a:bodyPr anchor="t"/>
           <a:lstStyle>
             <a:lvl2pPr>
-              <a:defRPr sz="2000"/>
+              <a:defRPr sz="650"/>
             </a:lvl2pPr>
             <a:lvl3pPr>
-              <a:defRPr sz="1800"/>
+              <a:defRPr sz="600"/>
             </a:lvl3pPr>
             <a:lvl4pPr>
-              <a:defRPr sz="1600"/>
+              <a:defRPr sz="550"/>
             </a:lvl4pPr>
             <a:lvl5pPr>
-              <a:defRPr sz="1600"/>
+              <a:defRPr sz="550"/>
             </a:lvl5pPr>
             <a:lvl6pPr>
-              <a:defRPr sz="1600"/>
+              <a:defRPr sz="550"/>
             </a:lvl6pPr>
             <a:lvl7pPr>
-              <a:defRPr sz="1600"/>
+              <a:defRPr sz="550"/>
             </a:lvl7pPr>
             <a:lvl8pPr>
-              <a:defRPr sz="1600"/>
+              <a:defRPr sz="550"/>
             </a:lvl8pPr>
             <a:lvl9pPr>
-              <a:defRPr sz="1600"/>
+              <a:defRPr sz="550"/>
             </a:lvl9pPr>
             <a:lvl1pPr algn="l">
               <a:defRPr sz="1050" b="0">
@@ -6615,6 +8523,39 @@
                 <a:cs typeface="MS PGothic"/>
               </a:defRPr>
             </a:lvl1pPr>
+            <a:lvl2pPr algn="r" marL="0" indent="0">
+              <a:buNone/>
+              <a:defRPr sz="800" b="0">
+                <a:solidFill>
+                  <a:srgbClr val="FFFFFF"/>
+                </a:solidFill>
+                <a:latin typeface="MS PGothic"/>
+                <a:ea typeface="MS PGothic"/>
+                <a:cs typeface="MS PGothic"/>
+              </a:defRPr>
+            </a:lvl2pPr>
+            <a:lvl3pPr algn="r" marL="0" indent="0">
+              <a:buNone/>
+              <a:defRPr sz="700" b="0">
+                <a:solidFill>
+                  <a:srgbClr val="FFFFFF"/>
+                </a:solidFill>
+                <a:latin typeface="MS PGothic"/>
+                <a:ea typeface="MS PGothic"/>
+                <a:cs typeface="MS PGothic"/>
+              </a:defRPr>
+            </a:lvl3pPr>
+            <a:lvl4pPr algn="r" marL="0" indent="0">
+              <a:buNone/>
+              <a:defRPr sz="550" b="0">
+                <a:solidFill>
+                  <a:srgbClr val="FFFFFF"/>
+                </a:solidFill>
+                <a:latin typeface="MS PGothic"/>
+                <a:ea typeface="MS PGothic"/>
+                <a:cs typeface="MS PGothic"/>
+              </a:defRPr>
+            </a:lvl4pPr>
           </a:lstStyle>
           <a:p>
             <a:r>
@@ -6654,6 +8595,39 @@
                 <a:cs typeface="MS PGothic"/>
               </a:defRPr>
             </a:lvl1pPr>
+            <a:lvl2pPr algn="l" marL="0" indent="0">
+              <a:buNone/>
+              <a:defRPr sz="750" b="0">
+                <a:solidFill>
+                  <a:srgbClr val="595959"/>
+                </a:solidFill>
+                <a:latin typeface="MS PGothic"/>
+                <a:ea typeface="MS PGothic"/>
+                <a:cs typeface="MS PGothic"/>
+              </a:defRPr>
+            </a:lvl2pPr>
+            <a:lvl3pPr algn="l" marL="0" indent="0">
+              <a:buNone/>
+              <a:defRPr sz="650" b="0">
+                <a:solidFill>
+                  <a:srgbClr val="595959"/>
+                </a:solidFill>
+                <a:latin typeface="MS PGothic"/>
+                <a:ea typeface="MS PGothic"/>
+                <a:cs typeface="MS PGothic"/>
+              </a:defRPr>
+            </a:lvl3pPr>
+            <a:lvl4pPr algn="l" marL="0" indent="0">
+              <a:buNone/>
+              <a:defRPr sz="550" b="0">
+                <a:solidFill>
+                  <a:srgbClr val="595959"/>
+                </a:solidFill>
+                <a:latin typeface="MS PGothic"/>
+                <a:ea typeface="MS PGothic"/>
+                <a:cs typeface="MS PGothic"/>
+              </a:defRPr>
+            </a:lvl4pPr>
           </a:lstStyle>
           <a:p>
             <a:r>
@@ -6874,6 +8848,36 @@
                 <a:ea typeface="MS PGothic"/>
               </a:defRPr>
             </a:lvl1pPr>
+            <a:lvl2pPr algn="l" marL="0" indent="0">
+              <a:buNone/>
+              <a:defRPr sz="900" b="0" i="1">
+                <a:solidFill>
+                  <a:srgbClr val="595959"/>
+                </a:solidFill>
+                <a:latin typeface="MS PGothic"/>
+                <a:ea typeface="MS PGothic"/>
+              </a:defRPr>
+            </a:lvl2pPr>
+            <a:lvl3pPr algn="l" marL="0" indent="0">
+              <a:buNone/>
+              <a:defRPr sz="750" b="0" i="1">
+                <a:solidFill>
+                  <a:srgbClr val="595959"/>
+                </a:solidFill>
+                <a:latin typeface="MS PGothic"/>
+                <a:ea typeface="MS PGothic"/>
+              </a:defRPr>
+            </a:lvl3pPr>
+            <a:lvl4pPr algn="l" marL="0" indent="0">
+              <a:buNone/>
+              <a:defRPr sz="650" b="0" i="1">
+                <a:solidFill>
+                  <a:srgbClr val="595959"/>
+                </a:solidFill>
+                <a:latin typeface="MS PGothic"/>
+                <a:ea typeface="MS PGothic"/>
+              </a:defRPr>
+            </a:lvl4pPr>
           </a:lstStyle>
           <a:p>
             <a:r>
@@ -6934,6 +8938,39 @@
                 <a:cs typeface="MS PGothic"/>
               </a:defRPr>
             </a:lvl1pPr>
+            <a:lvl2pPr algn="r" marL="0" indent="0">
+              <a:buNone/>
+              <a:defRPr sz="800" b="0">
+                <a:solidFill>
+                  <a:srgbClr val="FFFFFF"/>
+                </a:solidFill>
+                <a:latin typeface="MS PGothic"/>
+                <a:ea typeface="MS PGothic"/>
+                <a:cs typeface="MS PGothic"/>
+              </a:defRPr>
+            </a:lvl2pPr>
+            <a:lvl3pPr algn="r" marL="0" indent="0">
+              <a:buNone/>
+              <a:defRPr sz="700" b="0">
+                <a:solidFill>
+                  <a:srgbClr val="FFFFFF"/>
+                </a:solidFill>
+                <a:latin typeface="MS PGothic"/>
+                <a:ea typeface="MS PGothic"/>
+                <a:cs typeface="MS PGothic"/>
+              </a:defRPr>
+            </a:lvl3pPr>
+            <a:lvl4pPr algn="r" marL="0" indent="0">
+              <a:buNone/>
+              <a:defRPr sz="550" b="0">
+                <a:solidFill>
+                  <a:srgbClr val="FFFFFF"/>
+                </a:solidFill>
+                <a:latin typeface="MS PGothic"/>
+                <a:ea typeface="MS PGothic"/>
+                <a:cs typeface="MS PGothic"/>
+              </a:defRPr>
+            </a:lvl4pPr>
           </a:lstStyle>
           <a:p>
             <a:r>
@@ -6973,6 +9010,39 @@
                 <a:cs typeface="MS PGothic"/>
               </a:defRPr>
             </a:lvl1pPr>
+            <a:lvl2pPr algn="l" marL="0" indent="0">
+              <a:buNone/>
+              <a:defRPr sz="750" b="0">
+                <a:solidFill>
+                  <a:srgbClr val="595959"/>
+                </a:solidFill>
+                <a:latin typeface="MS PGothic"/>
+                <a:ea typeface="MS PGothic"/>
+                <a:cs typeface="MS PGothic"/>
+              </a:defRPr>
+            </a:lvl2pPr>
+            <a:lvl3pPr algn="l" marL="0" indent="0">
+              <a:buNone/>
+              <a:defRPr sz="650" b="0">
+                <a:solidFill>
+                  <a:srgbClr val="595959"/>
+                </a:solidFill>
+                <a:latin typeface="MS PGothic"/>
+                <a:ea typeface="MS PGothic"/>
+                <a:cs typeface="MS PGothic"/>
+              </a:defRPr>
+            </a:lvl3pPr>
+            <a:lvl4pPr algn="l" marL="0" indent="0">
+              <a:buNone/>
+              <a:defRPr sz="550" b="0">
+                <a:solidFill>
+                  <a:srgbClr val="595959"/>
+                </a:solidFill>
+                <a:latin typeface="MS PGothic"/>
+                <a:ea typeface="MS PGothic"/>
+                <a:cs typeface="MS PGothic"/>
+              </a:defRPr>
+            </a:lvl4pPr>
           </a:lstStyle>
           <a:p>
             <a:r>
@@ -7229,7 +9299,7 @@
           <a:lstStyle>
             <a:lvl2pPr marL="457200" indent="0">
               <a:buNone/>
-              <a:defRPr sz="1200"/>
+              <a:defRPr sz="400"/>
             </a:lvl2pPr>
             <a:lvl3pPr marL="914400" indent="0">
               <a:buNone/>
@@ -7392,6 +9462,39 @@
                 <a:cs typeface="MS PGothic"/>
               </a:defRPr>
             </a:lvl1pPr>
+            <a:lvl2pPr algn="r" marL="0" indent="0">
+              <a:buNone/>
+              <a:defRPr sz="800" b="0">
+                <a:solidFill>
+                  <a:srgbClr val="FFFFFF"/>
+                </a:solidFill>
+                <a:latin typeface="MS PGothic"/>
+                <a:ea typeface="MS PGothic"/>
+                <a:cs typeface="MS PGothic"/>
+              </a:defRPr>
+            </a:lvl2pPr>
+            <a:lvl3pPr algn="r" marL="0" indent="0">
+              <a:buNone/>
+              <a:defRPr sz="700" b="0">
+                <a:solidFill>
+                  <a:srgbClr val="FFFFFF"/>
+                </a:solidFill>
+                <a:latin typeface="MS PGothic"/>
+                <a:ea typeface="MS PGothic"/>
+                <a:cs typeface="MS PGothic"/>
+              </a:defRPr>
+            </a:lvl3pPr>
+            <a:lvl4pPr algn="r" marL="0" indent="0">
+              <a:buNone/>
+              <a:defRPr sz="550" b="0">
+                <a:solidFill>
+                  <a:srgbClr val="FFFFFF"/>
+                </a:solidFill>
+                <a:latin typeface="MS PGothic"/>
+                <a:ea typeface="MS PGothic"/>
+                <a:cs typeface="MS PGothic"/>
+              </a:defRPr>
+            </a:lvl4pPr>
           </a:lstStyle>
           <a:p>
             <a:r>
@@ -7431,6 +9534,39 @@
                 <a:cs typeface="MS PGothic"/>
               </a:defRPr>
             </a:lvl1pPr>
+            <a:lvl2pPr algn="l" marL="0" indent="0">
+              <a:buNone/>
+              <a:defRPr sz="750" b="0">
+                <a:solidFill>
+                  <a:srgbClr val="595959"/>
+                </a:solidFill>
+                <a:latin typeface="MS PGothic"/>
+                <a:ea typeface="MS PGothic"/>
+                <a:cs typeface="MS PGothic"/>
+              </a:defRPr>
+            </a:lvl2pPr>
+            <a:lvl3pPr algn="l" marL="0" indent="0">
+              <a:buNone/>
+              <a:defRPr sz="650" b="0">
+                <a:solidFill>
+                  <a:srgbClr val="595959"/>
+                </a:solidFill>
+                <a:latin typeface="MS PGothic"/>
+                <a:ea typeface="MS PGothic"/>
+                <a:cs typeface="MS PGothic"/>
+              </a:defRPr>
+            </a:lvl3pPr>
+            <a:lvl4pPr algn="l" marL="0" indent="0">
+              <a:buNone/>
+              <a:defRPr sz="550" b="0">
+                <a:solidFill>
+                  <a:srgbClr val="595959"/>
+                </a:solidFill>
+                <a:latin typeface="MS PGothic"/>
+                <a:ea typeface="MS PGothic"/>
+                <a:cs typeface="MS PGothic"/>
+              </a:defRPr>
+            </a:lvl4pPr>
           </a:lstStyle>
           <a:p>
             <a:r>
